--- a/public/fun/pack/pptx/family/가족소개_43_3대가족_설날세배.pptx
+++ b/public/fun/pack/pptx/family/가족소개_43_3대가족_설날세배.pptx
@@ -3286,14 +3286,6 @@
 <file path=ppt/slides/slide1.xml><?xml version="1.0" encoding="utf-8"?>
 <p:sld xmlns:a="http://schemas.openxmlformats.org/drawingml/2006/main" xmlns:p="http://schemas.openxmlformats.org/presentationml/2006/main" xmlns:r="http://schemas.openxmlformats.org/officeDocument/2006/relationships">
   <p:cSld>
-    <p:bg>
-      <p:bgPr>
-        <a:solidFill>
-          <a:srgbClr val="FFFFFF"/>
-        </a:solidFill>
-        <a:effectLst/>
-      </p:bgPr>
-    </p:bg>
     <p:spTree>
       <p:nvGrpSpPr>
         <p:cNvPr id="1" name=""/>
@@ -3301,325 +3293,30 @@
         <p:nvPr/>
       </p:nvGrpSpPr>
       <p:grpSpPr/>
-      <p:sp>
-        <p:nvSpPr>
-          <p:cNvPr id="3" name="장식"/>
-          <p:cNvSpPr/>
+      <p:pic>
+        <p:nvPicPr>
+          <p:cNvPr id="3" name="표지 그림" descr="family-43.jpg"/>
+          <p:cNvPicPr>
+            <a:picLocks noChangeAspect="1"/>
+          </p:cNvPicPr>
           <p:nvPr/>
-        </p:nvSpPr>
-        <p:spPr>
-          <a:xfrm>
-            <a:off x="-274320" y="4251960"/>
-            <a:ext cx="12740335" cy="2743200"/>
-          </a:xfrm>
-          <a:prstGeom prst="wave">
-            <a:avLst/>
-          </a:prstGeom>
-          <a:solidFill>
-            <a:srgbClr val="F0D1D6"/>
-          </a:solidFill>
-          <a:ln>
-            <a:noFill/>
-          </a:ln>
-        </p:spPr>
-        <p:txBody>
-          <a:bodyPr rtlCol="0" anchor="ctr"/>
-          <a:lstStyle/>
-          <a:p>
-            <a:pPr algn="ctr"/>
-          </a:p>
-        </p:txBody>
-      </p:sp>
-      <p:sp>
-        <p:nvSpPr>
-          <p:cNvPr id="4" name="장식"/>
-          <p:cNvSpPr/>
-          <p:nvPr/>
-        </p:nvSpPr>
-        <p:spPr>
-          <a:xfrm>
-            <a:off x="-274320" y="5074920"/>
-            <a:ext cx="12740335" cy="2331720"/>
-          </a:xfrm>
-          <a:prstGeom prst="wave">
-            <a:avLst/>
-          </a:prstGeom>
-          <a:solidFill>
-            <a:srgbClr val="8D3443"/>
-          </a:solidFill>
-          <a:ln>
-            <a:noFill/>
-          </a:ln>
-        </p:spPr>
-        <p:txBody>
-          <a:bodyPr rtlCol="0" anchor="ctr"/>
-          <a:lstStyle/>
-          <a:p>
-            <a:pPr algn="ctr"/>
-          </a:p>
-        </p:txBody>
-      </p:sp>
-      <p:sp>
-        <p:nvSpPr>
-          <p:cNvPr id="5" name="장식"/>
-          <p:cNvSpPr/>
-          <p:nvPr/>
-        </p:nvSpPr>
-        <p:spPr>
-          <a:xfrm>
-            <a:off x="8543294" y="1234440"/>
-            <a:ext cx="822959" cy="1371600"/>
-          </a:xfrm>
-          <a:prstGeom prst="roundRect">
-            <a:avLst/>
-          </a:prstGeom>
-          <a:solidFill>
-            <a:srgbClr val="8D3443"/>
-          </a:solidFill>
-          <a:ln>
-            <a:noFill/>
-          </a:ln>
-        </p:spPr>
-        <p:txBody>
-          <a:bodyPr rtlCol="0" anchor="ctr"/>
-          <a:lstStyle/>
-          <a:p>
-            <a:pPr algn="ctr"/>
-          </a:p>
-        </p:txBody>
-      </p:sp>
-      <p:sp>
-        <p:nvSpPr>
-          <p:cNvPr id="6" name="장식"/>
-          <p:cNvSpPr/>
-          <p:nvPr/>
-        </p:nvSpPr>
-        <p:spPr>
-          <a:xfrm>
-            <a:off x="8749034" y="1097280"/>
-            <a:ext cx="411479" cy="137160"/>
+        </p:nvPicPr>
+        <p:blipFill>
+          <a:blip r:embed="rId2"/>
+          <a:stretch>
+            <a:fillRect/>
+          </a:stretch>
+        </p:blipFill>
+        <p:spPr>
+          <a:xfrm>
+            <a:off x="0" y="0"/>
+            <a:ext cx="12191695" cy="6858000"/>
           </a:xfrm>
           <a:prstGeom prst="rect">
             <a:avLst/>
           </a:prstGeom>
-          <a:solidFill>
-            <a:srgbClr val="3B9158"/>
-          </a:solidFill>
-          <a:ln>
-            <a:noFill/>
-          </a:ln>
-        </p:spPr>
-        <p:txBody>
-          <a:bodyPr rtlCol="0" anchor="ctr"/>
-          <a:lstStyle/>
-          <a:p>
-            <a:pPr algn="ctr"/>
-          </a:p>
-        </p:txBody>
-      </p:sp>
-      <p:sp>
-        <p:nvSpPr>
-          <p:cNvPr id="7" name="장식"/>
-          <p:cNvSpPr/>
-          <p:nvPr/>
-        </p:nvSpPr>
-        <p:spPr>
-          <a:xfrm>
-            <a:off x="8749034" y="2606040"/>
-            <a:ext cx="411479" cy="137160"/>
-          </a:xfrm>
-          <a:prstGeom prst="rect">
-            <a:avLst/>
-          </a:prstGeom>
-          <a:solidFill>
-            <a:srgbClr val="3B9158"/>
-          </a:solidFill>
-          <a:ln>
-            <a:noFill/>
-          </a:ln>
-        </p:spPr>
-        <p:txBody>
-          <a:bodyPr rtlCol="0" anchor="ctr"/>
-          <a:lstStyle/>
-          <a:p>
-            <a:pPr algn="ctr"/>
-          </a:p>
-        </p:txBody>
-      </p:sp>
-      <p:sp>
-        <p:nvSpPr>
-          <p:cNvPr id="8" name="장식"/>
-          <p:cNvSpPr/>
-          <p:nvPr/>
-        </p:nvSpPr>
-        <p:spPr>
-          <a:xfrm>
-            <a:off x="9585710" y="1728216"/>
-            <a:ext cx="822959" cy="1152144"/>
-          </a:xfrm>
-          <a:prstGeom prst="roundRect">
-            <a:avLst/>
-          </a:prstGeom>
-          <a:solidFill>
-            <a:srgbClr val="F0D1D6"/>
-          </a:solidFill>
-          <a:ln>
-            <a:noFill/>
-          </a:ln>
-        </p:spPr>
-        <p:txBody>
-          <a:bodyPr rtlCol="0" anchor="ctr"/>
-          <a:lstStyle/>
-          <a:p>
-            <a:pPr algn="ctr"/>
-          </a:p>
-        </p:txBody>
-      </p:sp>
-      <p:sp>
-        <p:nvSpPr>
-          <p:cNvPr id="9" name="장식"/>
-          <p:cNvSpPr/>
-          <p:nvPr/>
-        </p:nvSpPr>
-        <p:spPr>
-          <a:xfrm>
-            <a:off x="9791450" y="1591056"/>
-            <a:ext cx="411479" cy="137160"/>
-          </a:xfrm>
-          <a:prstGeom prst="rect">
-            <a:avLst/>
-          </a:prstGeom>
-          <a:solidFill>
-            <a:srgbClr val="3B9158"/>
-          </a:solidFill>
-          <a:ln>
-            <a:noFill/>
-          </a:ln>
-        </p:spPr>
-        <p:txBody>
-          <a:bodyPr rtlCol="0" anchor="ctr"/>
-          <a:lstStyle/>
-          <a:p>
-            <a:pPr algn="ctr"/>
-          </a:p>
-        </p:txBody>
-      </p:sp>
-      <p:sp>
-        <p:nvSpPr>
-          <p:cNvPr id="10" name="장식"/>
-          <p:cNvSpPr/>
-          <p:nvPr/>
-        </p:nvSpPr>
-        <p:spPr>
-          <a:xfrm>
-            <a:off x="9791450" y="2880360"/>
-            <a:ext cx="411479" cy="137160"/>
-          </a:xfrm>
-          <a:prstGeom prst="rect">
-            <a:avLst/>
-          </a:prstGeom>
-          <a:solidFill>
-            <a:srgbClr val="3B9158"/>
-          </a:solidFill>
-          <a:ln>
-            <a:noFill/>
-          </a:ln>
-        </p:spPr>
-        <p:txBody>
-          <a:bodyPr rtlCol="0" anchor="ctr"/>
-          <a:lstStyle/>
-          <a:p>
-            <a:pPr algn="ctr"/>
-          </a:p>
-        </p:txBody>
-      </p:sp>
-      <p:sp>
-        <p:nvSpPr>
-          <p:cNvPr id="11" name="장식"/>
-          <p:cNvSpPr/>
-          <p:nvPr/>
-        </p:nvSpPr>
-        <p:spPr>
-          <a:xfrm>
-            <a:off x="10628126" y="1234440"/>
-            <a:ext cx="822959" cy="1371600"/>
-          </a:xfrm>
-          <a:prstGeom prst="roundRect">
-            <a:avLst/>
-          </a:prstGeom>
-          <a:solidFill>
-            <a:srgbClr val="3B9158"/>
-          </a:solidFill>
-          <a:ln>
-            <a:noFill/>
-          </a:ln>
-        </p:spPr>
-        <p:txBody>
-          <a:bodyPr rtlCol="0" anchor="ctr"/>
-          <a:lstStyle/>
-          <a:p>
-            <a:pPr algn="ctr"/>
-          </a:p>
-        </p:txBody>
-      </p:sp>
-      <p:sp>
-        <p:nvSpPr>
-          <p:cNvPr id="12" name="장식"/>
-          <p:cNvSpPr/>
-          <p:nvPr/>
-        </p:nvSpPr>
-        <p:spPr>
-          <a:xfrm>
-            <a:off x="10833866" y="1097280"/>
-            <a:ext cx="411479" cy="137160"/>
-          </a:xfrm>
-          <a:prstGeom prst="rect">
-            <a:avLst/>
-          </a:prstGeom>
-          <a:solidFill>
-            <a:srgbClr val="8D3443"/>
-          </a:solidFill>
-          <a:ln>
-            <a:noFill/>
-          </a:ln>
-        </p:spPr>
-        <p:txBody>
-          <a:bodyPr rtlCol="0" anchor="ctr"/>
-          <a:lstStyle/>
-          <a:p>
-            <a:pPr algn="ctr"/>
-          </a:p>
-        </p:txBody>
-      </p:sp>
-      <p:sp>
-        <p:nvSpPr>
-          <p:cNvPr id="13" name="장식"/>
-          <p:cNvSpPr/>
-          <p:nvPr/>
-        </p:nvSpPr>
-        <p:spPr>
-          <a:xfrm>
-            <a:off x="10833866" y="2606040"/>
-            <a:ext cx="411479" cy="137160"/>
-          </a:xfrm>
-          <a:prstGeom prst="rect">
-            <a:avLst/>
-          </a:prstGeom>
-          <a:solidFill>
-            <a:srgbClr val="8D3443"/>
-          </a:solidFill>
-          <a:ln>
-            <a:noFill/>
-          </a:ln>
-        </p:spPr>
-        <p:txBody>
-          <a:bodyPr rtlCol="0" anchor="ctr"/>
-          <a:lstStyle/>
-          <a:p>
-            <a:pPr algn="ctr"/>
-          </a:p>
-        </p:txBody>
-      </p:sp>
+        </p:spPr>
+      </p:pic>
       <p:sp>
         <p:nvSpPr>
           <p:cNvPr id="2" name="Title 1"/>
@@ -3632,8 +3329,8 @@
         </p:nvSpPr>
         <p:spPr>
           <a:xfrm>
-            <a:off x="975335" y="1371600"/>
-            <a:ext cx="7558851" cy="1463040"/>
+            <a:off x="853418" y="2057400"/>
+            <a:ext cx="6095847" cy="1554480"/>
           </a:xfrm>
         </p:spPr>
         <p:txBody>
@@ -3660,14 +3357,14 @@
       </p:sp>
       <p:sp>
         <p:nvSpPr>
-          <p:cNvPr id="14" name="한 줄 문구"/>
+          <p:cNvPr id="4" name="한 줄 문구"/>
           <p:cNvSpPr txBox="1"/>
           <p:nvPr/>
         </p:nvSpPr>
         <p:spPr>
           <a:xfrm>
-            <a:off x="975335" y="2926080"/>
-            <a:ext cx="7315017" cy="822960"/>
+            <a:off x="853418" y="3749039"/>
+            <a:ext cx="6095847" cy="822960"/>
           </a:xfrm>
           <a:prstGeom prst="rect">
             <a:avLst/>
@@ -3691,21 +3388,21 @@
                   <a:srgbClr val="431920"/>
                 </a:solidFill>
               </a:rPr>
-              <a:t>세배하는 날, 온 가족이 한자리에</a:t>
-            </a:r>
-          </a:p>
-        </p:txBody>
-      </p:sp>
-      <p:sp>
-        <p:nvSpPr>
-          <p:cNvPr id="15" name="안내 문구"/>
+              <a:t>세배 끝나고 줄 서서 세뱃돈</a:t>
+            </a:r>
+          </a:p>
+        </p:txBody>
+      </p:sp>
+      <p:sp>
+        <p:nvSpPr>
+          <p:cNvPr id="5" name="안내 문구"/>
           <p:cNvSpPr txBox="1"/>
           <p:nvPr/>
         </p:nvSpPr>
         <p:spPr>
           <a:xfrm>
-            <a:off x="975335" y="3794760"/>
-            <a:ext cx="7315017" cy="914400"/>
+            <a:off x="853418" y="4617720"/>
+            <a:ext cx="6095847" cy="914400"/>
           </a:xfrm>
           <a:prstGeom prst="rect">
             <a:avLst/>
@@ -3729,7 +3426,7 @@
                   <a:srgbClr val="666666"/>
                 </a:solidFill>
               </a:rPr>
-              <a:t>3대 가족 · 2026. 00. 00</a:t>
+              <a:t>3대 가족 · 2027. 00. 00</a:t>
             </a:r>
           </a:p>
         </p:txBody>
@@ -3820,267 +3517,6 @@
       </p:sp>
       <p:sp>
         <p:nvSpPr>
-          <p:cNvPr id="5" name="장식"/>
-          <p:cNvSpPr/>
-          <p:nvPr/>
-        </p:nvSpPr>
-        <p:spPr>
-          <a:xfrm>
-            <a:off x="10789920" y="525780"/>
-            <a:ext cx="301752" cy="502920"/>
-          </a:xfrm>
-          <a:prstGeom prst="roundRect">
-            <a:avLst/>
-          </a:prstGeom>
-          <a:solidFill>
-            <a:srgbClr val="8D3443"/>
-          </a:solidFill>
-          <a:ln>
-            <a:noFill/>
-          </a:ln>
-        </p:spPr>
-        <p:txBody>
-          <a:bodyPr rtlCol="0" anchor="ctr"/>
-          <a:lstStyle/>
-          <a:p>
-            <a:pPr algn="ctr"/>
-          </a:p>
-        </p:txBody>
-      </p:sp>
-      <p:sp>
-        <p:nvSpPr>
-          <p:cNvPr id="6" name="장식"/>
-          <p:cNvSpPr/>
-          <p:nvPr/>
-        </p:nvSpPr>
-        <p:spPr>
-          <a:xfrm>
-            <a:off x="10865358" y="475487"/>
-            <a:ext cx="150876" cy="50292"/>
-          </a:xfrm>
-          <a:prstGeom prst="rect">
-            <a:avLst/>
-          </a:prstGeom>
-          <a:solidFill>
-            <a:srgbClr val="3B9158"/>
-          </a:solidFill>
-          <a:ln>
-            <a:noFill/>
-          </a:ln>
-        </p:spPr>
-        <p:txBody>
-          <a:bodyPr rtlCol="0" anchor="ctr"/>
-          <a:lstStyle/>
-          <a:p>
-            <a:pPr algn="ctr"/>
-          </a:p>
-        </p:txBody>
-      </p:sp>
-      <p:sp>
-        <p:nvSpPr>
-          <p:cNvPr id="7" name="장식"/>
-          <p:cNvSpPr/>
-          <p:nvPr/>
-        </p:nvSpPr>
-        <p:spPr>
-          <a:xfrm>
-            <a:off x="10865358" y="1028700"/>
-            <a:ext cx="150876" cy="50292"/>
-          </a:xfrm>
-          <a:prstGeom prst="rect">
-            <a:avLst/>
-          </a:prstGeom>
-          <a:solidFill>
-            <a:srgbClr val="3B9158"/>
-          </a:solidFill>
-          <a:ln>
-            <a:noFill/>
-          </a:ln>
-        </p:spPr>
-        <p:txBody>
-          <a:bodyPr rtlCol="0" anchor="ctr"/>
-          <a:lstStyle/>
-          <a:p>
-            <a:pPr algn="ctr"/>
-          </a:p>
-        </p:txBody>
-      </p:sp>
-      <p:sp>
-        <p:nvSpPr>
-          <p:cNvPr id="8" name="장식"/>
-          <p:cNvSpPr/>
-          <p:nvPr/>
-        </p:nvSpPr>
-        <p:spPr>
-          <a:xfrm>
-            <a:off x="11172139" y="706831"/>
-            <a:ext cx="301752" cy="422452"/>
-          </a:xfrm>
-          <a:prstGeom prst="roundRect">
-            <a:avLst/>
-          </a:prstGeom>
-          <a:solidFill>
-            <a:srgbClr val="F0D1D6"/>
-          </a:solidFill>
-          <a:ln>
-            <a:noFill/>
-          </a:ln>
-        </p:spPr>
-        <p:txBody>
-          <a:bodyPr rtlCol="0" anchor="ctr"/>
-          <a:lstStyle/>
-          <a:p>
-            <a:pPr algn="ctr"/>
-          </a:p>
-        </p:txBody>
-      </p:sp>
-      <p:sp>
-        <p:nvSpPr>
-          <p:cNvPr id="9" name="장식"/>
-          <p:cNvSpPr/>
-          <p:nvPr/>
-        </p:nvSpPr>
-        <p:spPr>
-          <a:xfrm>
-            <a:off x="11247577" y="656539"/>
-            <a:ext cx="150876" cy="50292"/>
-          </a:xfrm>
-          <a:prstGeom prst="rect">
-            <a:avLst/>
-          </a:prstGeom>
-          <a:solidFill>
-            <a:srgbClr val="3B9158"/>
-          </a:solidFill>
-          <a:ln>
-            <a:noFill/>
-          </a:ln>
-        </p:spPr>
-        <p:txBody>
-          <a:bodyPr rtlCol="0" anchor="ctr"/>
-          <a:lstStyle/>
-          <a:p>
-            <a:pPr algn="ctr"/>
-          </a:p>
-        </p:txBody>
-      </p:sp>
-      <p:sp>
-        <p:nvSpPr>
-          <p:cNvPr id="10" name="장식"/>
-          <p:cNvSpPr/>
-          <p:nvPr/>
-        </p:nvSpPr>
-        <p:spPr>
-          <a:xfrm>
-            <a:off x="11247577" y="1129284"/>
-            <a:ext cx="150876" cy="50292"/>
-          </a:xfrm>
-          <a:prstGeom prst="rect">
-            <a:avLst/>
-          </a:prstGeom>
-          <a:solidFill>
-            <a:srgbClr val="3B9158"/>
-          </a:solidFill>
-          <a:ln>
-            <a:noFill/>
-          </a:ln>
-        </p:spPr>
-        <p:txBody>
-          <a:bodyPr rtlCol="0" anchor="ctr"/>
-          <a:lstStyle/>
-          <a:p>
-            <a:pPr algn="ctr"/>
-          </a:p>
-        </p:txBody>
-      </p:sp>
-      <p:sp>
-        <p:nvSpPr>
-          <p:cNvPr id="11" name="장식"/>
-          <p:cNvSpPr/>
-          <p:nvPr/>
-        </p:nvSpPr>
-        <p:spPr>
-          <a:xfrm>
-            <a:off x="11554358" y="525780"/>
-            <a:ext cx="301752" cy="502920"/>
-          </a:xfrm>
-          <a:prstGeom prst="roundRect">
-            <a:avLst/>
-          </a:prstGeom>
-          <a:solidFill>
-            <a:srgbClr val="3B9158"/>
-          </a:solidFill>
-          <a:ln>
-            <a:noFill/>
-          </a:ln>
-        </p:spPr>
-        <p:txBody>
-          <a:bodyPr rtlCol="0" anchor="ctr"/>
-          <a:lstStyle/>
-          <a:p>
-            <a:pPr algn="ctr"/>
-          </a:p>
-        </p:txBody>
-      </p:sp>
-      <p:sp>
-        <p:nvSpPr>
-          <p:cNvPr id="12" name="장식"/>
-          <p:cNvSpPr/>
-          <p:nvPr/>
-        </p:nvSpPr>
-        <p:spPr>
-          <a:xfrm>
-            <a:off x="11629796" y="475487"/>
-            <a:ext cx="150876" cy="50292"/>
-          </a:xfrm>
-          <a:prstGeom prst="rect">
-            <a:avLst/>
-          </a:prstGeom>
-          <a:solidFill>
-            <a:srgbClr val="8D3443"/>
-          </a:solidFill>
-          <a:ln>
-            <a:noFill/>
-          </a:ln>
-        </p:spPr>
-        <p:txBody>
-          <a:bodyPr rtlCol="0" anchor="ctr"/>
-          <a:lstStyle/>
-          <a:p>
-            <a:pPr algn="ctr"/>
-          </a:p>
-        </p:txBody>
-      </p:sp>
-      <p:sp>
-        <p:nvSpPr>
-          <p:cNvPr id="13" name="장식"/>
-          <p:cNvSpPr/>
-          <p:nvPr/>
-        </p:nvSpPr>
-        <p:spPr>
-          <a:xfrm>
-            <a:off x="11629796" y="1028700"/>
-            <a:ext cx="150876" cy="50292"/>
-          </a:xfrm>
-          <a:prstGeom prst="rect">
-            <a:avLst/>
-          </a:prstGeom>
-          <a:solidFill>
-            <a:srgbClr val="8D3443"/>
-          </a:solidFill>
-          <a:ln>
-            <a:noFill/>
-          </a:ln>
-        </p:spPr>
-        <p:txBody>
-          <a:bodyPr rtlCol="0" anchor="ctr"/>
-          <a:lstStyle/>
-          <a:p>
-            <a:pPr algn="ctr"/>
-          </a:p>
-        </p:txBody>
-      </p:sp>
-      <p:sp>
-        <p:nvSpPr>
           <p:cNvPr id="2" name="Title 1"/>
           <p:cNvSpPr>
             <a:spLocks noGrp="1"/>
@@ -4119,7 +3555,7 @@
       </p:sp>
       <p:sp>
         <p:nvSpPr>
-          <p:cNvPr id="14" name="사진 자리"/>
+          <p:cNvPr id="5" name="사진 자리"/>
           <p:cNvSpPr/>
           <p:nvPr/>
         </p:nvSpPr>
@@ -4165,7 +3601,7 @@
       </p:sp>
       <p:sp>
         <p:nvSpPr>
-          <p:cNvPr id="15" name="TextBox 14"/>
+          <p:cNvPr id="6" name="TextBox 5"/>
           <p:cNvSpPr txBox="1"/>
           <p:nvPr/>
         </p:nvSpPr>
@@ -4203,7 +3639,7 @@
       </p:sp>
       <p:sp>
         <p:nvSpPr>
-          <p:cNvPr id="16" name="TextBox 15"/>
+          <p:cNvPr id="7" name="TextBox 6"/>
           <p:cNvSpPr txBox="1"/>
           <p:nvPr/>
         </p:nvSpPr>
@@ -4271,7 +3707,7 @@
       </p:sp>
       <p:sp>
         <p:nvSpPr>
-          <p:cNvPr id="17" name="사진 자리"/>
+          <p:cNvPr id="8" name="사진 자리"/>
           <p:cNvSpPr/>
           <p:nvPr/>
         </p:nvSpPr>
@@ -4317,7 +3753,7 @@
       </p:sp>
       <p:sp>
         <p:nvSpPr>
-          <p:cNvPr id="18" name="TextBox 17"/>
+          <p:cNvPr id="9" name="TextBox 8"/>
           <p:cNvSpPr txBox="1"/>
           <p:nvPr/>
         </p:nvSpPr>
@@ -4355,7 +3791,7 @@
       </p:sp>
       <p:sp>
         <p:nvSpPr>
-          <p:cNvPr id="19" name="TextBox 18"/>
+          <p:cNvPr id="10" name="TextBox 9"/>
           <p:cNvSpPr txBox="1"/>
           <p:nvPr/>
         </p:nvSpPr>
@@ -4423,7 +3859,7 @@
       </p:sp>
       <p:sp>
         <p:nvSpPr>
-          <p:cNvPr id="20" name="사진 자리"/>
+          <p:cNvPr id="11" name="사진 자리"/>
           <p:cNvSpPr/>
           <p:nvPr/>
         </p:nvSpPr>
@@ -4469,7 +3905,7 @@
       </p:sp>
       <p:sp>
         <p:nvSpPr>
-          <p:cNvPr id="21" name="TextBox 20"/>
+          <p:cNvPr id="12" name="TextBox 11"/>
           <p:cNvSpPr txBox="1"/>
           <p:nvPr/>
         </p:nvSpPr>
@@ -4507,7 +3943,7 @@
       </p:sp>
       <p:sp>
         <p:nvSpPr>
-          <p:cNvPr id="22" name="TextBox 21"/>
+          <p:cNvPr id="13" name="TextBox 12"/>
           <p:cNvSpPr txBox="1"/>
           <p:nvPr/>
         </p:nvSpPr>
@@ -4575,7 +4011,7 @@
       </p:sp>
       <p:sp>
         <p:nvSpPr>
-          <p:cNvPr id="23" name="사진 자리"/>
+          <p:cNvPr id="14" name="사진 자리"/>
           <p:cNvSpPr/>
           <p:nvPr/>
         </p:nvSpPr>
@@ -4621,7 +4057,7 @@
       </p:sp>
       <p:sp>
         <p:nvSpPr>
-          <p:cNvPr id="24" name="TextBox 23"/>
+          <p:cNvPr id="15" name="TextBox 14"/>
           <p:cNvSpPr txBox="1"/>
           <p:nvPr/>
         </p:nvSpPr>
@@ -4659,7 +4095,7 @@
       </p:sp>
       <p:sp>
         <p:nvSpPr>
-          <p:cNvPr id="25" name="TextBox 24"/>
+          <p:cNvPr id="16" name="TextBox 15"/>
           <p:cNvSpPr txBox="1"/>
           <p:nvPr/>
         </p:nvSpPr>
@@ -4727,7 +4163,7 @@
       </p:sp>
       <p:sp>
         <p:nvSpPr>
-          <p:cNvPr id="26" name="사진 자리"/>
+          <p:cNvPr id="17" name="사진 자리"/>
           <p:cNvSpPr/>
           <p:nvPr/>
         </p:nvSpPr>
@@ -4773,7 +4209,7 @@
       </p:sp>
       <p:sp>
         <p:nvSpPr>
-          <p:cNvPr id="27" name="TextBox 26"/>
+          <p:cNvPr id="18" name="TextBox 17"/>
           <p:cNvSpPr txBox="1"/>
           <p:nvPr/>
         </p:nvSpPr>
@@ -4811,7 +4247,7 @@
       </p:sp>
       <p:sp>
         <p:nvSpPr>
-          <p:cNvPr id="28" name="TextBox 27"/>
+          <p:cNvPr id="19" name="TextBox 18"/>
           <p:cNvSpPr txBox="1"/>
           <p:nvPr/>
         </p:nvSpPr>
@@ -4879,7 +4315,7 @@
       </p:sp>
       <p:sp>
         <p:nvSpPr>
-          <p:cNvPr id="29" name="사진 자리"/>
+          <p:cNvPr id="20" name="사진 자리"/>
           <p:cNvSpPr/>
           <p:nvPr/>
         </p:nvSpPr>
@@ -4925,7 +4361,7 @@
       </p:sp>
       <p:sp>
         <p:nvSpPr>
-          <p:cNvPr id="30" name="TextBox 29"/>
+          <p:cNvPr id="21" name="TextBox 20"/>
           <p:cNvSpPr txBox="1"/>
           <p:nvPr/>
         </p:nvSpPr>
@@ -4963,7 +4399,7 @@
       </p:sp>
       <p:sp>
         <p:nvSpPr>
-          <p:cNvPr id="31" name="TextBox 30"/>
+          <p:cNvPr id="22" name="TextBox 21"/>
           <p:cNvSpPr txBox="1"/>
           <p:nvPr/>
         </p:nvSpPr>
@@ -5115,103 +4551,54 @@
       </p:sp>
       <p:sp>
         <p:nvSpPr>
-          <p:cNvPr id="5" name="장식"/>
+          <p:cNvPr id="2" name="Title 1"/>
+          <p:cNvSpPr>
+            <a:spLocks noGrp="1"/>
+          </p:cNvSpPr>
+          <p:nvPr>
+            <p:ph type="title"/>
+          </p:nvPr>
+        </p:nvSpPr>
+        <p:spPr>
+          <a:xfrm>
+            <a:off x="640080" y="457200"/>
+            <a:ext cx="9722815" cy="868680"/>
+          </a:xfrm>
+        </p:spPr>
+        <p:txBody>
+          <a:bodyPr wrap="square" lIns="54864" rIns="54864" tIns="27432" bIns="27432" anchor="ctr">
+            <a:noAutofit/>
+          </a:bodyPr>
+          <a:lstStyle/>
+          <a:p>
+            <a:pPr algn="l">
+              <a:lnSpc>
+                <a:spcPct val="105000"/>
+              </a:lnSpc>
+            </a:pPr>
+            <a:r>
+              <a:rPr sz="3000" b="1" i="0">
+                <a:solidFill>
+                  <a:srgbClr val="431920"/>
+                </a:solidFill>
+              </a:rPr>
+              <a:t>우리 가족 이야기</a:t>
+            </a:r>
+          </a:p>
+        </p:txBody>
+      </p:sp>
+      <p:sp>
+        <p:nvSpPr>
+          <p:cNvPr id="5" name="타임라인 선"/>
           <p:cNvSpPr/>
           <p:nvPr/>
         </p:nvSpPr>
         <p:spPr>
           <a:xfrm>
-            <a:off x="10789920" y="525780"/>
-            <a:ext cx="301752" cy="502920"/>
-          </a:xfrm>
-          <a:prstGeom prst="roundRect">
-            <a:avLst/>
-          </a:prstGeom>
-          <a:solidFill>
-            <a:srgbClr val="8D3443"/>
-          </a:solidFill>
-          <a:ln>
-            <a:noFill/>
-          </a:ln>
-        </p:spPr>
-        <p:txBody>
-          <a:bodyPr rtlCol="0" anchor="ctr"/>
-          <a:lstStyle/>
-          <a:p>
-            <a:pPr algn="ctr"/>
-          </a:p>
-        </p:txBody>
-      </p:sp>
-      <p:sp>
-        <p:nvSpPr>
-          <p:cNvPr id="6" name="장식"/>
-          <p:cNvSpPr/>
-          <p:nvPr/>
-        </p:nvSpPr>
-        <p:spPr>
-          <a:xfrm>
-            <a:off x="10865358" y="475487"/>
-            <a:ext cx="150876" cy="50292"/>
+            <a:off x="640080" y="3291840"/>
+            <a:ext cx="10911535" cy="54864"/>
           </a:xfrm>
           <a:prstGeom prst="rect">
-            <a:avLst/>
-          </a:prstGeom>
-          <a:solidFill>
-            <a:srgbClr val="3B9158"/>
-          </a:solidFill>
-          <a:ln>
-            <a:noFill/>
-          </a:ln>
-        </p:spPr>
-        <p:txBody>
-          <a:bodyPr rtlCol="0" anchor="ctr"/>
-          <a:lstStyle/>
-          <a:p>
-            <a:pPr algn="ctr"/>
-          </a:p>
-        </p:txBody>
-      </p:sp>
-      <p:sp>
-        <p:nvSpPr>
-          <p:cNvPr id="7" name="장식"/>
-          <p:cNvSpPr/>
-          <p:nvPr/>
-        </p:nvSpPr>
-        <p:spPr>
-          <a:xfrm>
-            <a:off x="10865358" y="1028700"/>
-            <a:ext cx="150876" cy="50292"/>
-          </a:xfrm>
-          <a:prstGeom prst="rect">
-            <a:avLst/>
-          </a:prstGeom>
-          <a:solidFill>
-            <a:srgbClr val="3B9158"/>
-          </a:solidFill>
-          <a:ln>
-            <a:noFill/>
-          </a:ln>
-        </p:spPr>
-        <p:txBody>
-          <a:bodyPr rtlCol="0" anchor="ctr"/>
-          <a:lstStyle/>
-          <a:p>
-            <a:pPr algn="ctr"/>
-          </a:p>
-        </p:txBody>
-      </p:sp>
-      <p:sp>
-        <p:nvSpPr>
-          <p:cNvPr id="8" name="장식"/>
-          <p:cNvSpPr/>
-          <p:nvPr/>
-        </p:nvSpPr>
-        <p:spPr>
-          <a:xfrm>
-            <a:off x="11172139" y="706831"/>
-            <a:ext cx="301752" cy="422452"/>
-          </a:xfrm>
-          <a:prstGeom prst="roundRect">
             <a:avLst/>
           </a:prstGeom>
           <a:solidFill>
@@ -5231,219 +4618,7 @@
       </p:sp>
       <p:sp>
         <p:nvSpPr>
-          <p:cNvPr id="9" name="장식"/>
-          <p:cNvSpPr/>
-          <p:nvPr/>
-        </p:nvSpPr>
-        <p:spPr>
-          <a:xfrm>
-            <a:off x="11247577" y="656539"/>
-            <a:ext cx="150876" cy="50292"/>
-          </a:xfrm>
-          <a:prstGeom prst="rect">
-            <a:avLst/>
-          </a:prstGeom>
-          <a:solidFill>
-            <a:srgbClr val="3B9158"/>
-          </a:solidFill>
-          <a:ln>
-            <a:noFill/>
-          </a:ln>
-        </p:spPr>
-        <p:txBody>
-          <a:bodyPr rtlCol="0" anchor="ctr"/>
-          <a:lstStyle/>
-          <a:p>
-            <a:pPr algn="ctr"/>
-          </a:p>
-        </p:txBody>
-      </p:sp>
-      <p:sp>
-        <p:nvSpPr>
-          <p:cNvPr id="10" name="장식"/>
-          <p:cNvSpPr/>
-          <p:nvPr/>
-        </p:nvSpPr>
-        <p:spPr>
-          <a:xfrm>
-            <a:off x="11247577" y="1129284"/>
-            <a:ext cx="150876" cy="50292"/>
-          </a:xfrm>
-          <a:prstGeom prst="rect">
-            <a:avLst/>
-          </a:prstGeom>
-          <a:solidFill>
-            <a:srgbClr val="3B9158"/>
-          </a:solidFill>
-          <a:ln>
-            <a:noFill/>
-          </a:ln>
-        </p:spPr>
-        <p:txBody>
-          <a:bodyPr rtlCol="0" anchor="ctr"/>
-          <a:lstStyle/>
-          <a:p>
-            <a:pPr algn="ctr"/>
-          </a:p>
-        </p:txBody>
-      </p:sp>
-      <p:sp>
-        <p:nvSpPr>
-          <p:cNvPr id="11" name="장식"/>
-          <p:cNvSpPr/>
-          <p:nvPr/>
-        </p:nvSpPr>
-        <p:spPr>
-          <a:xfrm>
-            <a:off x="11554358" y="525780"/>
-            <a:ext cx="301752" cy="502920"/>
-          </a:xfrm>
-          <a:prstGeom prst="roundRect">
-            <a:avLst/>
-          </a:prstGeom>
-          <a:solidFill>
-            <a:srgbClr val="3B9158"/>
-          </a:solidFill>
-          <a:ln>
-            <a:noFill/>
-          </a:ln>
-        </p:spPr>
-        <p:txBody>
-          <a:bodyPr rtlCol="0" anchor="ctr"/>
-          <a:lstStyle/>
-          <a:p>
-            <a:pPr algn="ctr"/>
-          </a:p>
-        </p:txBody>
-      </p:sp>
-      <p:sp>
-        <p:nvSpPr>
-          <p:cNvPr id="12" name="장식"/>
-          <p:cNvSpPr/>
-          <p:nvPr/>
-        </p:nvSpPr>
-        <p:spPr>
-          <a:xfrm>
-            <a:off x="11629796" y="475487"/>
-            <a:ext cx="150876" cy="50292"/>
-          </a:xfrm>
-          <a:prstGeom prst="rect">
-            <a:avLst/>
-          </a:prstGeom>
-          <a:solidFill>
-            <a:srgbClr val="8D3443"/>
-          </a:solidFill>
-          <a:ln>
-            <a:noFill/>
-          </a:ln>
-        </p:spPr>
-        <p:txBody>
-          <a:bodyPr rtlCol="0" anchor="ctr"/>
-          <a:lstStyle/>
-          <a:p>
-            <a:pPr algn="ctr"/>
-          </a:p>
-        </p:txBody>
-      </p:sp>
-      <p:sp>
-        <p:nvSpPr>
-          <p:cNvPr id="13" name="장식"/>
-          <p:cNvSpPr/>
-          <p:nvPr/>
-        </p:nvSpPr>
-        <p:spPr>
-          <a:xfrm>
-            <a:off x="11629796" y="1028700"/>
-            <a:ext cx="150876" cy="50292"/>
-          </a:xfrm>
-          <a:prstGeom prst="rect">
-            <a:avLst/>
-          </a:prstGeom>
-          <a:solidFill>
-            <a:srgbClr val="8D3443"/>
-          </a:solidFill>
-          <a:ln>
-            <a:noFill/>
-          </a:ln>
-        </p:spPr>
-        <p:txBody>
-          <a:bodyPr rtlCol="0" anchor="ctr"/>
-          <a:lstStyle/>
-          <a:p>
-            <a:pPr algn="ctr"/>
-          </a:p>
-        </p:txBody>
-      </p:sp>
-      <p:sp>
-        <p:nvSpPr>
-          <p:cNvPr id="2" name="Title 1"/>
-          <p:cNvSpPr>
-            <a:spLocks noGrp="1"/>
-          </p:cNvSpPr>
-          <p:nvPr>
-            <p:ph type="title"/>
-          </p:nvPr>
-        </p:nvSpPr>
-        <p:spPr>
-          <a:xfrm>
-            <a:off x="640080" y="457200"/>
-            <a:ext cx="9722815" cy="868680"/>
-          </a:xfrm>
-        </p:spPr>
-        <p:txBody>
-          <a:bodyPr wrap="square" lIns="54864" rIns="54864" tIns="27432" bIns="27432" anchor="ctr">
-            <a:noAutofit/>
-          </a:bodyPr>
-          <a:lstStyle/>
-          <a:p>
-            <a:pPr algn="l">
-              <a:lnSpc>
-                <a:spcPct val="105000"/>
-              </a:lnSpc>
-            </a:pPr>
-            <a:r>
-              <a:rPr sz="3000" b="1" i="0">
-                <a:solidFill>
-                  <a:srgbClr val="431920"/>
-                </a:solidFill>
-              </a:rPr>
-              <a:t>우리 가족 이야기</a:t>
-            </a:r>
-          </a:p>
-        </p:txBody>
-      </p:sp>
-      <p:sp>
-        <p:nvSpPr>
-          <p:cNvPr id="14" name="타임라인 선"/>
-          <p:cNvSpPr/>
-          <p:nvPr/>
-        </p:nvSpPr>
-        <p:spPr>
-          <a:xfrm>
-            <a:off x="640080" y="3291840"/>
-            <a:ext cx="10911535" cy="54864"/>
-          </a:xfrm>
-          <a:prstGeom prst="rect">
-            <a:avLst/>
-          </a:prstGeom>
-          <a:solidFill>
-            <a:srgbClr val="F0D1D6"/>
-          </a:solidFill>
-          <a:ln>
-            <a:noFill/>
-          </a:ln>
-        </p:spPr>
-        <p:txBody>
-          <a:bodyPr rtlCol="0" anchor="ctr"/>
-          <a:lstStyle/>
-          <a:p>
-            <a:pPr algn="ctr"/>
-          </a:p>
-        </p:txBody>
-      </p:sp>
-      <p:sp>
-        <p:nvSpPr>
-          <p:cNvPr id="15" name="때 1"/>
+          <p:cNvPr id="6" name="때 1"/>
           <p:cNvSpPr/>
           <p:nvPr/>
         </p:nvSpPr>
@@ -5474,7 +4649,7 @@
       </p:sp>
       <p:sp>
         <p:nvSpPr>
-          <p:cNvPr id="16" name="TextBox 15"/>
+          <p:cNvPr id="7" name="TextBox 6"/>
           <p:cNvSpPr txBox="1"/>
           <p:nvPr/>
         </p:nvSpPr>
@@ -5512,7 +4687,7 @@
       </p:sp>
       <p:sp>
         <p:nvSpPr>
-          <p:cNvPr id="17" name="TextBox 16"/>
+          <p:cNvPr id="8" name="TextBox 7"/>
           <p:cNvSpPr txBox="1"/>
           <p:nvPr/>
         </p:nvSpPr>
@@ -5550,7 +4725,7 @@
       </p:sp>
       <p:sp>
         <p:nvSpPr>
-          <p:cNvPr id="18" name="TextBox 17"/>
+          <p:cNvPr id="9" name="TextBox 8"/>
           <p:cNvSpPr txBox="1"/>
           <p:nvPr/>
         </p:nvSpPr>
@@ -5588,7 +4763,7 @@
       </p:sp>
       <p:sp>
         <p:nvSpPr>
-          <p:cNvPr id="19" name="때 2"/>
+          <p:cNvPr id="10" name="때 2"/>
           <p:cNvSpPr/>
           <p:nvPr/>
         </p:nvSpPr>
@@ -5619,7 +4794,7 @@
       </p:sp>
       <p:sp>
         <p:nvSpPr>
-          <p:cNvPr id="20" name="TextBox 19"/>
+          <p:cNvPr id="11" name="TextBox 10"/>
           <p:cNvSpPr txBox="1"/>
           <p:nvPr/>
         </p:nvSpPr>
@@ -5657,7 +4832,7 @@
       </p:sp>
       <p:sp>
         <p:nvSpPr>
-          <p:cNvPr id="21" name="TextBox 20"/>
+          <p:cNvPr id="12" name="TextBox 11"/>
           <p:cNvSpPr txBox="1"/>
           <p:nvPr/>
         </p:nvSpPr>
@@ -5695,7 +4870,7 @@
       </p:sp>
       <p:sp>
         <p:nvSpPr>
-          <p:cNvPr id="22" name="TextBox 21"/>
+          <p:cNvPr id="13" name="TextBox 12"/>
           <p:cNvSpPr txBox="1"/>
           <p:nvPr/>
         </p:nvSpPr>
@@ -5733,7 +4908,7 @@
       </p:sp>
       <p:sp>
         <p:nvSpPr>
-          <p:cNvPr id="23" name="때 3"/>
+          <p:cNvPr id="14" name="때 3"/>
           <p:cNvSpPr/>
           <p:nvPr/>
         </p:nvSpPr>
@@ -5764,7 +4939,7 @@
       </p:sp>
       <p:sp>
         <p:nvSpPr>
-          <p:cNvPr id="24" name="TextBox 23"/>
+          <p:cNvPr id="15" name="TextBox 14"/>
           <p:cNvSpPr txBox="1"/>
           <p:nvPr/>
         </p:nvSpPr>
@@ -5802,7 +4977,7 @@
       </p:sp>
       <p:sp>
         <p:nvSpPr>
-          <p:cNvPr id="25" name="TextBox 24"/>
+          <p:cNvPr id="16" name="TextBox 15"/>
           <p:cNvSpPr txBox="1"/>
           <p:nvPr/>
         </p:nvSpPr>
@@ -5840,7 +5015,7 @@
       </p:sp>
       <p:sp>
         <p:nvSpPr>
-          <p:cNvPr id="26" name="TextBox 25"/>
+          <p:cNvPr id="17" name="TextBox 16"/>
           <p:cNvSpPr txBox="1"/>
           <p:nvPr/>
         </p:nvSpPr>
@@ -5878,7 +5053,7 @@
       </p:sp>
       <p:sp>
         <p:nvSpPr>
-          <p:cNvPr id="27" name="때 4"/>
+          <p:cNvPr id="18" name="때 4"/>
           <p:cNvSpPr/>
           <p:nvPr/>
         </p:nvSpPr>
@@ -5909,7 +5084,7 @@
       </p:sp>
       <p:sp>
         <p:nvSpPr>
-          <p:cNvPr id="28" name="TextBox 27"/>
+          <p:cNvPr id="19" name="TextBox 18"/>
           <p:cNvSpPr txBox="1"/>
           <p:nvPr/>
         </p:nvSpPr>
@@ -5947,7 +5122,7 @@
       </p:sp>
       <p:sp>
         <p:nvSpPr>
-          <p:cNvPr id="29" name="TextBox 28"/>
+          <p:cNvPr id="20" name="TextBox 19"/>
           <p:cNvSpPr txBox="1"/>
           <p:nvPr/>
         </p:nvSpPr>
@@ -5985,7 +5160,7 @@
       </p:sp>
       <p:sp>
         <p:nvSpPr>
-          <p:cNvPr id="30" name="TextBox 29"/>
+          <p:cNvPr id="21" name="TextBox 20"/>
           <p:cNvSpPr txBox="1"/>
           <p:nvPr/>
         </p:nvSpPr>
@@ -6107,267 +5282,6 @@
       </p:sp>
       <p:sp>
         <p:nvSpPr>
-          <p:cNvPr id="5" name="장식"/>
-          <p:cNvSpPr/>
-          <p:nvPr/>
-        </p:nvSpPr>
-        <p:spPr>
-          <a:xfrm>
-            <a:off x="10789920" y="525780"/>
-            <a:ext cx="301752" cy="502920"/>
-          </a:xfrm>
-          <a:prstGeom prst="roundRect">
-            <a:avLst/>
-          </a:prstGeom>
-          <a:solidFill>
-            <a:srgbClr val="8D3443"/>
-          </a:solidFill>
-          <a:ln>
-            <a:noFill/>
-          </a:ln>
-        </p:spPr>
-        <p:txBody>
-          <a:bodyPr rtlCol="0" anchor="ctr"/>
-          <a:lstStyle/>
-          <a:p>
-            <a:pPr algn="ctr"/>
-          </a:p>
-        </p:txBody>
-      </p:sp>
-      <p:sp>
-        <p:nvSpPr>
-          <p:cNvPr id="6" name="장식"/>
-          <p:cNvSpPr/>
-          <p:nvPr/>
-        </p:nvSpPr>
-        <p:spPr>
-          <a:xfrm>
-            <a:off x="10865358" y="475487"/>
-            <a:ext cx="150876" cy="50292"/>
-          </a:xfrm>
-          <a:prstGeom prst="rect">
-            <a:avLst/>
-          </a:prstGeom>
-          <a:solidFill>
-            <a:srgbClr val="3B9158"/>
-          </a:solidFill>
-          <a:ln>
-            <a:noFill/>
-          </a:ln>
-        </p:spPr>
-        <p:txBody>
-          <a:bodyPr rtlCol="0" anchor="ctr"/>
-          <a:lstStyle/>
-          <a:p>
-            <a:pPr algn="ctr"/>
-          </a:p>
-        </p:txBody>
-      </p:sp>
-      <p:sp>
-        <p:nvSpPr>
-          <p:cNvPr id="7" name="장식"/>
-          <p:cNvSpPr/>
-          <p:nvPr/>
-        </p:nvSpPr>
-        <p:spPr>
-          <a:xfrm>
-            <a:off x="10865358" y="1028700"/>
-            <a:ext cx="150876" cy="50292"/>
-          </a:xfrm>
-          <a:prstGeom prst="rect">
-            <a:avLst/>
-          </a:prstGeom>
-          <a:solidFill>
-            <a:srgbClr val="3B9158"/>
-          </a:solidFill>
-          <a:ln>
-            <a:noFill/>
-          </a:ln>
-        </p:spPr>
-        <p:txBody>
-          <a:bodyPr rtlCol="0" anchor="ctr"/>
-          <a:lstStyle/>
-          <a:p>
-            <a:pPr algn="ctr"/>
-          </a:p>
-        </p:txBody>
-      </p:sp>
-      <p:sp>
-        <p:nvSpPr>
-          <p:cNvPr id="8" name="장식"/>
-          <p:cNvSpPr/>
-          <p:nvPr/>
-        </p:nvSpPr>
-        <p:spPr>
-          <a:xfrm>
-            <a:off x="11172139" y="706831"/>
-            <a:ext cx="301752" cy="422452"/>
-          </a:xfrm>
-          <a:prstGeom prst="roundRect">
-            <a:avLst/>
-          </a:prstGeom>
-          <a:solidFill>
-            <a:srgbClr val="F0D1D6"/>
-          </a:solidFill>
-          <a:ln>
-            <a:noFill/>
-          </a:ln>
-        </p:spPr>
-        <p:txBody>
-          <a:bodyPr rtlCol="0" anchor="ctr"/>
-          <a:lstStyle/>
-          <a:p>
-            <a:pPr algn="ctr"/>
-          </a:p>
-        </p:txBody>
-      </p:sp>
-      <p:sp>
-        <p:nvSpPr>
-          <p:cNvPr id="9" name="장식"/>
-          <p:cNvSpPr/>
-          <p:nvPr/>
-        </p:nvSpPr>
-        <p:spPr>
-          <a:xfrm>
-            <a:off x="11247577" y="656539"/>
-            <a:ext cx="150876" cy="50292"/>
-          </a:xfrm>
-          <a:prstGeom prst="rect">
-            <a:avLst/>
-          </a:prstGeom>
-          <a:solidFill>
-            <a:srgbClr val="3B9158"/>
-          </a:solidFill>
-          <a:ln>
-            <a:noFill/>
-          </a:ln>
-        </p:spPr>
-        <p:txBody>
-          <a:bodyPr rtlCol="0" anchor="ctr"/>
-          <a:lstStyle/>
-          <a:p>
-            <a:pPr algn="ctr"/>
-          </a:p>
-        </p:txBody>
-      </p:sp>
-      <p:sp>
-        <p:nvSpPr>
-          <p:cNvPr id="10" name="장식"/>
-          <p:cNvSpPr/>
-          <p:nvPr/>
-        </p:nvSpPr>
-        <p:spPr>
-          <a:xfrm>
-            <a:off x="11247577" y="1129284"/>
-            <a:ext cx="150876" cy="50292"/>
-          </a:xfrm>
-          <a:prstGeom prst="rect">
-            <a:avLst/>
-          </a:prstGeom>
-          <a:solidFill>
-            <a:srgbClr val="3B9158"/>
-          </a:solidFill>
-          <a:ln>
-            <a:noFill/>
-          </a:ln>
-        </p:spPr>
-        <p:txBody>
-          <a:bodyPr rtlCol="0" anchor="ctr"/>
-          <a:lstStyle/>
-          <a:p>
-            <a:pPr algn="ctr"/>
-          </a:p>
-        </p:txBody>
-      </p:sp>
-      <p:sp>
-        <p:nvSpPr>
-          <p:cNvPr id="11" name="장식"/>
-          <p:cNvSpPr/>
-          <p:nvPr/>
-        </p:nvSpPr>
-        <p:spPr>
-          <a:xfrm>
-            <a:off x="11554358" y="525780"/>
-            <a:ext cx="301752" cy="502920"/>
-          </a:xfrm>
-          <a:prstGeom prst="roundRect">
-            <a:avLst/>
-          </a:prstGeom>
-          <a:solidFill>
-            <a:srgbClr val="3B9158"/>
-          </a:solidFill>
-          <a:ln>
-            <a:noFill/>
-          </a:ln>
-        </p:spPr>
-        <p:txBody>
-          <a:bodyPr rtlCol="0" anchor="ctr"/>
-          <a:lstStyle/>
-          <a:p>
-            <a:pPr algn="ctr"/>
-          </a:p>
-        </p:txBody>
-      </p:sp>
-      <p:sp>
-        <p:nvSpPr>
-          <p:cNvPr id="12" name="장식"/>
-          <p:cNvSpPr/>
-          <p:nvPr/>
-        </p:nvSpPr>
-        <p:spPr>
-          <a:xfrm>
-            <a:off x="11629796" y="475487"/>
-            <a:ext cx="150876" cy="50292"/>
-          </a:xfrm>
-          <a:prstGeom prst="rect">
-            <a:avLst/>
-          </a:prstGeom>
-          <a:solidFill>
-            <a:srgbClr val="8D3443"/>
-          </a:solidFill>
-          <a:ln>
-            <a:noFill/>
-          </a:ln>
-        </p:spPr>
-        <p:txBody>
-          <a:bodyPr rtlCol="0" anchor="ctr"/>
-          <a:lstStyle/>
-          <a:p>
-            <a:pPr algn="ctr"/>
-          </a:p>
-        </p:txBody>
-      </p:sp>
-      <p:sp>
-        <p:nvSpPr>
-          <p:cNvPr id="13" name="장식"/>
-          <p:cNvSpPr/>
-          <p:nvPr/>
-        </p:nvSpPr>
-        <p:spPr>
-          <a:xfrm>
-            <a:off x="11629796" y="1028700"/>
-            <a:ext cx="150876" cy="50292"/>
-          </a:xfrm>
-          <a:prstGeom prst="rect">
-            <a:avLst/>
-          </a:prstGeom>
-          <a:solidFill>
-            <a:srgbClr val="8D3443"/>
-          </a:solidFill>
-          <a:ln>
-            <a:noFill/>
-          </a:ln>
-        </p:spPr>
-        <p:txBody>
-          <a:bodyPr rtlCol="0" anchor="ctr"/>
-          <a:lstStyle/>
-          <a:p>
-            <a:pPr algn="ctr"/>
-          </a:p>
-        </p:txBody>
-      </p:sp>
-      <p:sp>
-        <p:nvSpPr>
           <p:cNvPr id="2" name="Title 1"/>
           <p:cNvSpPr>
             <a:spLocks noGrp="1"/>
@@ -6406,7 +5320,7 @@
       </p:sp>
       <p:sp>
         <p:nvSpPr>
-          <p:cNvPr id="14" name="줄 1"/>
+          <p:cNvPr id="5" name="줄 1"/>
           <p:cNvSpPr/>
           <p:nvPr/>
         </p:nvSpPr>
@@ -6439,7 +5353,7 @@
       </p:sp>
       <p:sp>
         <p:nvSpPr>
-          <p:cNvPr id="15" name="번호 1"/>
+          <p:cNvPr id="6" name="번호 1"/>
           <p:cNvSpPr/>
           <p:nvPr/>
         </p:nvSpPr>
@@ -6482,7 +5396,7 @@
       </p:sp>
       <p:sp>
         <p:nvSpPr>
-          <p:cNvPr id="16" name="TextBox 15"/>
+          <p:cNvPr id="7" name="TextBox 6"/>
           <p:cNvSpPr txBox="1"/>
           <p:nvPr/>
         </p:nvSpPr>
@@ -6520,7 +5434,7 @@
       </p:sp>
       <p:sp>
         <p:nvSpPr>
-          <p:cNvPr id="17" name="TextBox 16"/>
+          <p:cNvPr id="8" name="TextBox 7"/>
           <p:cNvSpPr txBox="1"/>
           <p:nvPr/>
         </p:nvSpPr>
@@ -6558,7 +5472,7 @@
       </p:sp>
       <p:sp>
         <p:nvSpPr>
-          <p:cNvPr id="18" name="줄 2"/>
+          <p:cNvPr id="9" name="줄 2"/>
           <p:cNvSpPr/>
           <p:nvPr/>
         </p:nvSpPr>
@@ -6591,7 +5505,7 @@
       </p:sp>
       <p:sp>
         <p:nvSpPr>
-          <p:cNvPr id="19" name="번호 2"/>
+          <p:cNvPr id="10" name="번호 2"/>
           <p:cNvSpPr/>
           <p:nvPr/>
         </p:nvSpPr>
@@ -6634,7 +5548,7 @@
       </p:sp>
       <p:sp>
         <p:nvSpPr>
-          <p:cNvPr id="20" name="TextBox 19"/>
+          <p:cNvPr id="11" name="TextBox 10"/>
           <p:cNvSpPr txBox="1"/>
           <p:nvPr/>
         </p:nvSpPr>
@@ -6672,7 +5586,7 @@
       </p:sp>
       <p:sp>
         <p:nvSpPr>
-          <p:cNvPr id="21" name="TextBox 20"/>
+          <p:cNvPr id="12" name="TextBox 11"/>
           <p:cNvSpPr txBox="1"/>
           <p:nvPr/>
         </p:nvSpPr>
@@ -6710,7 +5624,7 @@
       </p:sp>
       <p:sp>
         <p:nvSpPr>
-          <p:cNvPr id="22" name="줄 3"/>
+          <p:cNvPr id="13" name="줄 3"/>
           <p:cNvSpPr/>
           <p:nvPr/>
         </p:nvSpPr>
@@ -6743,7 +5657,7 @@
       </p:sp>
       <p:sp>
         <p:nvSpPr>
-          <p:cNvPr id="23" name="번호 3"/>
+          <p:cNvPr id="14" name="번호 3"/>
           <p:cNvSpPr/>
           <p:nvPr/>
         </p:nvSpPr>
@@ -6786,7 +5700,7 @@
       </p:sp>
       <p:sp>
         <p:nvSpPr>
-          <p:cNvPr id="24" name="TextBox 23"/>
+          <p:cNvPr id="15" name="TextBox 14"/>
           <p:cNvSpPr txBox="1"/>
           <p:nvPr/>
         </p:nvSpPr>
@@ -6824,7 +5738,7 @@
       </p:sp>
       <p:sp>
         <p:nvSpPr>
-          <p:cNvPr id="25" name="TextBox 24"/>
+          <p:cNvPr id="16" name="TextBox 15"/>
           <p:cNvSpPr txBox="1"/>
           <p:nvPr/>
         </p:nvSpPr>
@@ -6946,267 +5860,6 @@
       </p:sp>
       <p:sp>
         <p:nvSpPr>
-          <p:cNvPr id="5" name="장식"/>
-          <p:cNvSpPr/>
-          <p:nvPr/>
-        </p:nvSpPr>
-        <p:spPr>
-          <a:xfrm>
-            <a:off x="10789920" y="525780"/>
-            <a:ext cx="301752" cy="502920"/>
-          </a:xfrm>
-          <a:prstGeom prst="roundRect">
-            <a:avLst/>
-          </a:prstGeom>
-          <a:solidFill>
-            <a:srgbClr val="8D3443"/>
-          </a:solidFill>
-          <a:ln>
-            <a:noFill/>
-          </a:ln>
-        </p:spPr>
-        <p:txBody>
-          <a:bodyPr rtlCol="0" anchor="ctr"/>
-          <a:lstStyle/>
-          <a:p>
-            <a:pPr algn="ctr"/>
-          </a:p>
-        </p:txBody>
-      </p:sp>
-      <p:sp>
-        <p:nvSpPr>
-          <p:cNvPr id="6" name="장식"/>
-          <p:cNvSpPr/>
-          <p:nvPr/>
-        </p:nvSpPr>
-        <p:spPr>
-          <a:xfrm>
-            <a:off x="10865358" y="475487"/>
-            <a:ext cx="150876" cy="50292"/>
-          </a:xfrm>
-          <a:prstGeom prst="rect">
-            <a:avLst/>
-          </a:prstGeom>
-          <a:solidFill>
-            <a:srgbClr val="3B9158"/>
-          </a:solidFill>
-          <a:ln>
-            <a:noFill/>
-          </a:ln>
-        </p:spPr>
-        <p:txBody>
-          <a:bodyPr rtlCol="0" anchor="ctr"/>
-          <a:lstStyle/>
-          <a:p>
-            <a:pPr algn="ctr"/>
-          </a:p>
-        </p:txBody>
-      </p:sp>
-      <p:sp>
-        <p:nvSpPr>
-          <p:cNvPr id="7" name="장식"/>
-          <p:cNvSpPr/>
-          <p:nvPr/>
-        </p:nvSpPr>
-        <p:spPr>
-          <a:xfrm>
-            <a:off x="10865358" y="1028700"/>
-            <a:ext cx="150876" cy="50292"/>
-          </a:xfrm>
-          <a:prstGeom prst="rect">
-            <a:avLst/>
-          </a:prstGeom>
-          <a:solidFill>
-            <a:srgbClr val="3B9158"/>
-          </a:solidFill>
-          <a:ln>
-            <a:noFill/>
-          </a:ln>
-        </p:spPr>
-        <p:txBody>
-          <a:bodyPr rtlCol="0" anchor="ctr"/>
-          <a:lstStyle/>
-          <a:p>
-            <a:pPr algn="ctr"/>
-          </a:p>
-        </p:txBody>
-      </p:sp>
-      <p:sp>
-        <p:nvSpPr>
-          <p:cNvPr id="8" name="장식"/>
-          <p:cNvSpPr/>
-          <p:nvPr/>
-        </p:nvSpPr>
-        <p:spPr>
-          <a:xfrm>
-            <a:off x="11172139" y="706831"/>
-            <a:ext cx="301752" cy="422452"/>
-          </a:xfrm>
-          <a:prstGeom prst="roundRect">
-            <a:avLst/>
-          </a:prstGeom>
-          <a:solidFill>
-            <a:srgbClr val="F0D1D6"/>
-          </a:solidFill>
-          <a:ln>
-            <a:noFill/>
-          </a:ln>
-        </p:spPr>
-        <p:txBody>
-          <a:bodyPr rtlCol="0" anchor="ctr"/>
-          <a:lstStyle/>
-          <a:p>
-            <a:pPr algn="ctr"/>
-          </a:p>
-        </p:txBody>
-      </p:sp>
-      <p:sp>
-        <p:nvSpPr>
-          <p:cNvPr id="9" name="장식"/>
-          <p:cNvSpPr/>
-          <p:nvPr/>
-        </p:nvSpPr>
-        <p:spPr>
-          <a:xfrm>
-            <a:off x="11247577" y="656539"/>
-            <a:ext cx="150876" cy="50292"/>
-          </a:xfrm>
-          <a:prstGeom prst="rect">
-            <a:avLst/>
-          </a:prstGeom>
-          <a:solidFill>
-            <a:srgbClr val="3B9158"/>
-          </a:solidFill>
-          <a:ln>
-            <a:noFill/>
-          </a:ln>
-        </p:spPr>
-        <p:txBody>
-          <a:bodyPr rtlCol="0" anchor="ctr"/>
-          <a:lstStyle/>
-          <a:p>
-            <a:pPr algn="ctr"/>
-          </a:p>
-        </p:txBody>
-      </p:sp>
-      <p:sp>
-        <p:nvSpPr>
-          <p:cNvPr id="10" name="장식"/>
-          <p:cNvSpPr/>
-          <p:nvPr/>
-        </p:nvSpPr>
-        <p:spPr>
-          <a:xfrm>
-            <a:off x="11247577" y="1129284"/>
-            <a:ext cx="150876" cy="50292"/>
-          </a:xfrm>
-          <a:prstGeom prst="rect">
-            <a:avLst/>
-          </a:prstGeom>
-          <a:solidFill>
-            <a:srgbClr val="3B9158"/>
-          </a:solidFill>
-          <a:ln>
-            <a:noFill/>
-          </a:ln>
-        </p:spPr>
-        <p:txBody>
-          <a:bodyPr rtlCol="0" anchor="ctr"/>
-          <a:lstStyle/>
-          <a:p>
-            <a:pPr algn="ctr"/>
-          </a:p>
-        </p:txBody>
-      </p:sp>
-      <p:sp>
-        <p:nvSpPr>
-          <p:cNvPr id="11" name="장식"/>
-          <p:cNvSpPr/>
-          <p:nvPr/>
-        </p:nvSpPr>
-        <p:spPr>
-          <a:xfrm>
-            <a:off x="11554358" y="525780"/>
-            <a:ext cx="301752" cy="502920"/>
-          </a:xfrm>
-          <a:prstGeom prst="roundRect">
-            <a:avLst/>
-          </a:prstGeom>
-          <a:solidFill>
-            <a:srgbClr val="3B9158"/>
-          </a:solidFill>
-          <a:ln>
-            <a:noFill/>
-          </a:ln>
-        </p:spPr>
-        <p:txBody>
-          <a:bodyPr rtlCol="0" anchor="ctr"/>
-          <a:lstStyle/>
-          <a:p>
-            <a:pPr algn="ctr"/>
-          </a:p>
-        </p:txBody>
-      </p:sp>
-      <p:sp>
-        <p:nvSpPr>
-          <p:cNvPr id="12" name="장식"/>
-          <p:cNvSpPr/>
-          <p:nvPr/>
-        </p:nvSpPr>
-        <p:spPr>
-          <a:xfrm>
-            <a:off x="11629796" y="475487"/>
-            <a:ext cx="150876" cy="50292"/>
-          </a:xfrm>
-          <a:prstGeom prst="rect">
-            <a:avLst/>
-          </a:prstGeom>
-          <a:solidFill>
-            <a:srgbClr val="8D3443"/>
-          </a:solidFill>
-          <a:ln>
-            <a:noFill/>
-          </a:ln>
-        </p:spPr>
-        <p:txBody>
-          <a:bodyPr rtlCol="0" anchor="ctr"/>
-          <a:lstStyle/>
-          <a:p>
-            <a:pPr algn="ctr"/>
-          </a:p>
-        </p:txBody>
-      </p:sp>
-      <p:sp>
-        <p:nvSpPr>
-          <p:cNvPr id="13" name="장식"/>
-          <p:cNvSpPr/>
-          <p:nvPr/>
-        </p:nvSpPr>
-        <p:spPr>
-          <a:xfrm>
-            <a:off x="11629796" y="1028700"/>
-            <a:ext cx="150876" cy="50292"/>
-          </a:xfrm>
-          <a:prstGeom prst="rect">
-            <a:avLst/>
-          </a:prstGeom>
-          <a:solidFill>
-            <a:srgbClr val="8D3443"/>
-          </a:solidFill>
-          <a:ln>
-            <a:noFill/>
-          </a:ln>
-        </p:spPr>
-        <p:txBody>
-          <a:bodyPr rtlCol="0" anchor="ctr"/>
-          <a:lstStyle/>
-          <a:p>
-            <a:pPr algn="ctr"/>
-          </a:p>
-        </p:txBody>
-      </p:sp>
-      <p:sp>
-        <p:nvSpPr>
           <p:cNvPr id="2" name="Title 1"/>
           <p:cNvSpPr>
             <a:spLocks noGrp="1"/>
@@ -7245,7 +5898,7 @@
       </p:sp>
       <p:sp>
         <p:nvSpPr>
-          <p:cNvPr id="14" name="사진 자리"/>
+          <p:cNvPr id="5" name="사진 자리"/>
           <p:cNvSpPr/>
           <p:nvPr/>
         </p:nvSpPr>
@@ -7293,7 +5946,7 @@
       </p:sp>
       <p:sp>
         <p:nvSpPr>
-          <p:cNvPr id="15" name="사진 자리"/>
+          <p:cNvPr id="6" name="사진 자리"/>
           <p:cNvSpPr/>
           <p:nvPr/>
         </p:nvSpPr>
@@ -7341,7 +5994,7 @@
       </p:sp>
       <p:sp>
         <p:nvSpPr>
-          <p:cNvPr id="16" name="사진 자리"/>
+          <p:cNvPr id="7" name="사진 자리"/>
           <p:cNvSpPr/>
           <p:nvPr/>
         </p:nvSpPr>
@@ -7389,7 +6042,7 @@
       </p:sp>
       <p:sp>
         <p:nvSpPr>
-          <p:cNvPr id="17" name="사진 자리"/>
+          <p:cNvPr id="8" name="사진 자리"/>
           <p:cNvSpPr/>
           <p:nvPr/>
         </p:nvSpPr>
@@ -7437,7 +6090,7 @@
       </p:sp>
       <p:sp>
         <p:nvSpPr>
-          <p:cNvPr id="18" name="사진 자리"/>
+          <p:cNvPr id="9" name="사진 자리"/>
           <p:cNvSpPr/>
           <p:nvPr/>
         </p:nvSpPr>
@@ -7485,7 +6138,7 @@
       </p:sp>
       <p:sp>
         <p:nvSpPr>
-          <p:cNvPr id="19" name="사진 자리"/>
+          <p:cNvPr id="10" name="사진 자리"/>
           <p:cNvSpPr/>
           <p:nvPr/>
         </p:nvSpPr>
@@ -7542,14 +6195,6 @@
 <file path=ppt/slides/slide6.xml><?xml version="1.0" encoding="utf-8"?>
 <p:sld xmlns:a="http://schemas.openxmlformats.org/drawingml/2006/main" xmlns:p="http://schemas.openxmlformats.org/presentationml/2006/main" xmlns:r="http://schemas.openxmlformats.org/officeDocument/2006/relationships">
   <p:cSld>
-    <p:bg>
-      <p:bgPr>
-        <a:solidFill>
-          <a:srgbClr val="FFFFFF"/>
-        </a:solidFill>
-        <a:effectLst/>
-      </p:bgPr>
-    </p:bg>
     <p:spTree>
       <p:nvGrpSpPr>
         <p:cNvPr id="1" name=""/>
@@ -7557,325 +6202,30 @@
         <p:nvPr/>
       </p:nvGrpSpPr>
       <p:grpSpPr/>
-      <p:sp>
-        <p:nvSpPr>
-          <p:cNvPr id="3" name="장식"/>
-          <p:cNvSpPr/>
+      <p:pic>
+        <p:nvPicPr>
+          <p:cNvPr id="3" name="표지 그림" descr="family-43.jpg"/>
+          <p:cNvPicPr>
+            <a:picLocks noChangeAspect="1"/>
+          </p:cNvPicPr>
           <p:nvPr/>
-        </p:nvSpPr>
-        <p:spPr>
-          <a:xfrm>
-            <a:off x="-274320" y="4251960"/>
-            <a:ext cx="12740335" cy="2743200"/>
-          </a:xfrm>
-          <a:prstGeom prst="wave">
-            <a:avLst/>
-          </a:prstGeom>
-          <a:solidFill>
-            <a:srgbClr val="F0D1D6"/>
-          </a:solidFill>
-          <a:ln>
-            <a:noFill/>
-          </a:ln>
-        </p:spPr>
-        <p:txBody>
-          <a:bodyPr rtlCol="0" anchor="ctr"/>
-          <a:lstStyle/>
-          <a:p>
-            <a:pPr algn="ctr"/>
-          </a:p>
-        </p:txBody>
-      </p:sp>
-      <p:sp>
-        <p:nvSpPr>
-          <p:cNvPr id="4" name="장식"/>
-          <p:cNvSpPr/>
-          <p:nvPr/>
-        </p:nvSpPr>
-        <p:spPr>
-          <a:xfrm>
-            <a:off x="-274320" y="5074920"/>
-            <a:ext cx="12740335" cy="2331720"/>
-          </a:xfrm>
-          <a:prstGeom prst="wave">
-            <a:avLst/>
-          </a:prstGeom>
-          <a:solidFill>
-            <a:srgbClr val="8D3443"/>
-          </a:solidFill>
-          <a:ln>
-            <a:noFill/>
-          </a:ln>
-        </p:spPr>
-        <p:txBody>
-          <a:bodyPr rtlCol="0" anchor="ctr"/>
-          <a:lstStyle/>
-          <a:p>
-            <a:pPr algn="ctr"/>
-          </a:p>
-        </p:txBody>
-      </p:sp>
-      <p:sp>
-        <p:nvSpPr>
-          <p:cNvPr id="5" name="장식"/>
-          <p:cNvSpPr/>
-          <p:nvPr/>
-        </p:nvSpPr>
-        <p:spPr>
-          <a:xfrm>
-            <a:off x="8543294" y="1234440"/>
-            <a:ext cx="822959" cy="1371600"/>
-          </a:xfrm>
-          <a:prstGeom prst="roundRect">
-            <a:avLst/>
-          </a:prstGeom>
-          <a:solidFill>
-            <a:srgbClr val="8D3443"/>
-          </a:solidFill>
-          <a:ln>
-            <a:noFill/>
-          </a:ln>
-        </p:spPr>
-        <p:txBody>
-          <a:bodyPr rtlCol="0" anchor="ctr"/>
-          <a:lstStyle/>
-          <a:p>
-            <a:pPr algn="ctr"/>
-          </a:p>
-        </p:txBody>
-      </p:sp>
-      <p:sp>
-        <p:nvSpPr>
-          <p:cNvPr id="6" name="장식"/>
-          <p:cNvSpPr/>
-          <p:nvPr/>
-        </p:nvSpPr>
-        <p:spPr>
-          <a:xfrm>
-            <a:off x="8749034" y="1097280"/>
-            <a:ext cx="411479" cy="137160"/>
+        </p:nvPicPr>
+        <p:blipFill>
+          <a:blip r:embed="rId2"/>
+          <a:stretch>
+            <a:fillRect/>
+          </a:stretch>
+        </p:blipFill>
+        <p:spPr>
+          <a:xfrm>
+            <a:off x="0" y="0"/>
+            <a:ext cx="12191695" cy="6858000"/>
           </a:xfrm>
           <a:prstGeom prst="rect">
             <a:avLst/>
           </a:prstGeom>
-          <a:solidFill>
-            <a:srgbClr val="3B9158"/>
-          </a:solidFill>
-          <a:ln>
-            <a:noFill/>
-          </a:ln>
-        </p:spPr>
-        <p:txBody>
-          <a:bodyPr rtlCol="0" anchor="ctr"/>
-          <a:lstStyle/>
-          <a:p>
-            <a:pPr algn="ctr"/>
-          </a:p>
-        </p:txBody>
-      </p:sp>
-      <p:sp>
-        <p:nvSpPr>
-          <p:cNvPr id="7" name="장식"/>
-          <p:cNvSpPr/>
-          <p:nvPr/>
-        </p:nvSpPr>
-        <p:spPr>
-          <a:xfrm>
-            <a:off x="8749034" y="2606040"/>
-            <a:ext cx="411479" cy="137160"/>
-          </a:xfrm>
-          <a:prstGeom prst="rect">
-            <a:avLst/>
-          </a:prstGeom>
-          <a:solidFill>
-            <a:srgbClr val="3B9158"/>
-          </a:solidFill>
-          <a:ln>
-            <a:noFill/>
-          </a:ln>
-        </p:spPr>
-        <p:txBody>
-          <a:bodyPr rtlCol="0" anchor="ctr"/>
-          <a:lstStyle/>
-          <a:p>
-            <a:pPr algn="ctr"/>
-          </a:p>
-        </p:txBody>
-      </p:sp>
-      <p:sp>
-        <p:nvSpPr>
-          <p:cNvPr id="8" name="장식"/>
-          <p:cNvSpPr/>
-          <p:nvPr/>
-        </p:nvSpPr>
-        <p:spPr>
-          <a:xfrm>
-            <a:off x="9585710" y="1728216"/>
-            <a:ext cx="822959" cy="1152144"/>
-          </a:xfrm>
-          <a:prstGeom prst="roundRect">
-            <a:avLst/>
-          </a:prstGeom>
-          <a:solidFill>
-            <a:srgbClr val="F0D1D6"/>
-          </a:solidFill>
-          <a:ln>
-            <a:noFill/>
-          </a:ln>
-        </p:spPr>
-        <p:txBody>
-          <a:bodyPr rtlCol="0" anchor="ctr"/>
-          <a:lstStyle/>
-          <a:p>
-            <a:pPr algn="ctr"/>
-          </a:p>
-        </p:txBody>
-      </p:sp>
-      <p:sp>
-        <p:nvSpPr>
-          <p:cNvPr id="9" name="장식"/>
-          <p:cNvSpPr/>
-          <p:nvPr/>
-        </p:nvSpPr>
-        <p:spPr>
-          <a:xfrm>
-            <a:off x="9791450" y="1591056"/>
-            <a:ext cx="411479" cy="137160"/>
-          </a:xfrm>
-          <a:prstGeom prst="rect">
-            <a:avLst/>
-          </a:prstGeom>
-          <a:solidFill>
-            <a:srgbClr val="3B9158"/>
-          </a:solidFill>
-          <a:ln>
-            <a:noFill/>
-          </a:ln>
-        </p:spPr>
-        <p:txBody>
-          <a:bodyPr rtlCol="0" anchor="ctr"/>
-          <a:lstStyle/>
-          <a:p>
-            <a:pPr algn="ctr"/>
-          </a:p>
-        </p:txBody>
-      </p:sp>
-      <p:sp>
-        <p:nvSpPr>
-          <p:cNvPr id="10" name="장식"/>
-          <p:cNvSpPr/>
-          <p:nvPr/>
-        </p:nvSpPr>
-        <p:spPr>
-          <a:xfrm>
-            <a:off x="9791450" y="2880360"/>
-            <a:ext cx="411479" cy="137160"/>
-          </a:xfrm>
-          <a:prstGeom prst="rect">
-            <a:avLst/>
-          </a:prstGeom>
-          <a:solidFill>
-            <a:srgbClr val="3B9158"/>
-          </a:solidFill>
-          <a:ln>
-            <a:noFill/>
-          </a:ln>
-        </p:spPr>
-        <p:txBody>
-          <a:bodyPr rtlCol="0" anchor="ctr"/>
-          <a:lstStyle/>
-          <a:p>
-            <a:pPr algn="ctr"/>
-          </a:p>
-        </p:txBody>
-      </p:sp>
-      <p:sp>
-        <p:nvSpPr>
-          <p:cNvPr id="11" name="장식"/>
-          <p:cNvSpPr/>
-          <p:nvPr/>
-        </p:nvSpPr>
-        <p:spPr>
-          <a:xfrm>
-            <a:off x="10628126" y="1234440"/>
-            <a:ext cx="822959" cy="1371600"/>
-          </a:xfrm>
-          <a:prstGeom prst="roundRect">
-            <a:avLst/>
-          </a:prstGeom>
-          <a:solidFill>
-            <a:srgbClr val="3B9158"/>
-          </a:solidFill>
-          <a:ln>
-            <a:noFill/>
-          </a:ln>
-        </p:spPr>
-        <p:txBody>
-          <a:bodyPr rtlCol="0" anchor="ctr"/>
-          <a:lstStyle/>
-          <a:p>
-            <a:pPr algn="ctr"/>
-          </a:p>
-        </p:txBody>
-      </p:sp>
-      <p:sp>
-        <p:nvSpPr>
-          <p:cNvPr id="12" name="장식"/>
-          <p:cNvSpPr/>
-          <p:nvPr/>
-        </p:nvSpPr>
-        <p:spPr>
-          <a:xfrm>
-            <a:off x="10833866" y="1097280"/>
-            <a:ext cx="411479" cy="137160"/>
-          </a:xfrm>
-          <a:prstGeom prst="rect">
-            <a:avLst/>
-          </a:prstGeom>
-          <a:solidFill>
-            <a:srgbClr val="8D3443"/>
-          </a:solidFill>
-          <a:ln>
-            <a:noFill/>
-          </a:ln>
-        </p:spPr>
-        <p:txBody>
-          <a:bodyPr rtlCol="0" anchor="ctr"/>
-          <a:lstStyle/>
-          <a:p>
-            <a:pPr algn="ctr"/>
-          </a:p>
-        </p:txBody>
-      </p:sp>
-      <p:sp>
-        <p:nvSpPr>
-          <p:cNvPr id="13" name="장식"/>
-          <p:cNvSpPr/>
-          <p:nvPr/>
-        </p:nvSpPr>
-        <p:spPr>
-          <a:xfrm>
-            <a:off x="10833866" y="2606040"/>
-            <a:ext cx="411479" cy="137160"/>
-          </a:xfrm>
-          <a:prstGeom prst="rect">
-            <a:avLst/>
-          </a:prstGeom>
-          <a:solidFill>
-            <a:srgbClr val="8D3443"/>
-          </a:solidFill>
-          <a:ln>
-            <a:noFill/>
-          </a:ln>
-        </p:spPr>
-        <p:txBody>
-          <a:bodyPr rtlCol="0" anchor="ctr"/>
-          <a:lstStyle/>
-          <a:p>
-            <a:pPr algn="ctr"/>
-          </a:p>
-        </p:txBody>
-      </p:sp>
+        </p:spPr>
+      </p:pic>
       <p:sp>
         <p:nvSpPr>
           <p:cNvPr id="2" name="Title 1"/>
@@ -7888,8 +6238,8 @@
         </p:nvSpPr>
         <p:spPr>
           <a:xfrm>
-            <a:off x="975335" y="1371600"/>
-            <a:ext cx="7558851" cy="1463040"/>
+            <a:off x="853418" y="2057400"/>
+            <a:ext cx="6095847" cy="1554480"/>
           </a:xfrm>
         </p:spPr>
         <p:txBody>
@@ -7909,21 +6259,21 @@
                   <a:srgbClr val="431920"/>
                 </a:solidFill>
               </a:rPr>
-              <a:t>우리 가족을 소개했어요</a:t>
-            </a:r>
-          </a:p>
-        </p:txBody>
-      </p:sp>
-      <p:sp>
-        <p:nvSpPr>
-          <p:cNvPr id="14" name="한 줄 문구"/>
+              <a:t>우리 가족 소개를 마칩니다</a:t>
+            </a:r>
+          </a:p>
+        </p:txBody>
+      </p:sp>
+      <p:sp>
+        <p:nvSpPr>
+          <p:cNvPr id="4" name="한 줄 문구"/>
           <p:cNvSpPr txBox="1"/>
           <p:nvPr/>
         </p:nvSpPr>
         <p:spPr>
           <a:xfrm>
-            <a:off x="975335" y="2926080"/>
-            <a:ext cx="7315017" cy="822960"/>
+            <a:off x="853418" y="3749039"/>
+            <a:ext cx="6095847" cy="822960"/>
           </a:xfrm>
           <a:prstGeom prst="rect">
             <a:avLst/>
@@ -7947,21 +6297,21 @@
                   <a:srgbClr val="431920"/>
                 </a:solidFill>
               </a:rPr>
-              <a:t>함께여서 늘 든든합니다</a:t>
-            </a:r>
-          </a:p>
-        </p:txBody>
-      </p:sp>
-      <p:sp>
-        <p:nvSpPr>
-          <p:cNvPr id="15" name="안내 문구"/>
+              <a:t>읽어 주셔서 고맙습니다</a:t>
+            </a:r>
+          </a:p>
+        </p:txBody>
+      </p:sp>
+      <p:sp>
+        <p:nvSpPr>
+          <p:cNvPr id="5" name="안내 문구"/>
           <p:cNvSpPr txBox="1"/>
           <p:nvPr/>
         </p:nvSpPr>
         <p:spPr>
           <a:xfrm>
-            <a:off x="975335" y="3794760"/>
-            <a:ext cx="7315017" cy="914400"/>
+            <a:off x="853418" y="4617720"/>
+            <a:ext cx="6095847" cy="914400"/>
           </a:xfrm>
           <a:prstGeom prst="rect">
             <a:avLst/>

--- a/public/fun/pack/pptx/family/가족소개_43_3대가족_설날세배.pptx
+++ b/public/fun/pack/pptx/family/가족소개_43_3대가족_설날세배.pptx
@@ -3286,6 +3286,14 @@
 <file path=ppt/slides/slide1.xml><?xml version="1.0" encoding="utf-8"?>
 <p:sld xmlns:a="http://schemas.openxmlformats.org/drawingml/2006/main" xmlns:p="http://schemas.openxmlformats.org/presentationml/2006/main" xmlns:r="http://schemas.openxmlformats.org/officeDocument/2006/relationships">
   <p:cSld>
+    <p:bg>
+      <p:bgPr>
+        <a:solidFill>
+          <a:srgbClr val="F6D5DA"/>
+        </a:solidFill>
+        <a:effectLst/>
+      </p:bgPr>
+    </p:bg>
     <p:spTree>
       <p:nvGrpSpPr>
         <p:cNvPr id="1" name=""/>
@@ -3293,30 +3301,120 @@
         <p:nvPr/>
       </p:nvGrpSpPr>
       <p:grpSpPr/>
-      <p:pic>
-        <p:nvPicPr>
-          <p:cNvPr id="3" name="표지 그림" descr="family-43.jpg"/>
-          <p:cNvPicPr>
-            <a:picLocks noChangeAspect="1"/>
-          </p:cNvPicPr>
-          <p:nvPr/>
-        </p:nvPicPr>
-        <p:blipFill>
-          <a:blip r:embed="rId2"/>
-          <a:stretch>
-            <a:fillRect/>
-          </a:stretch>
-        </p:blipFill>
-        <p:spPr>
-          <a:xfrm>
-            <a:off x="0" y="0"/>
-            <a:ext cx="12191695" cy="6858000"/>
+      <p:sp>
+        <p:nvSpPr>
+          <p:cNvPr id="3" name="사진 자리"/>
+          <p:cNvSpPr/>
+          <p:nvPr/>
+        </p:nvSpPr>
+        <p:spPr>
+          <a:xfrm>
+            <a:off x="7071183" y="960120"/>
+            <a:ext cx="3657508" cy="4526280"/>
+          </a:xfrm>
+          <a:prstGeom prst="roundRect">
+            <a:avLst>
+              <a:gd name="adj" fmla="val 4000"/>
+            </a:avLst>
+          </a:prstGeom>
+          <a:solidFill>
+            <a:srgbClr val="EBADB8"/>
+          </a:solidFill>
+          <a:ln>
+            <a:noFill/>
+          </a:ln>
+        </p:spPr>
+        <p:txBody>
+          <a:bodyPr rtlCol="0" anchor="ctr" wrap="square" lIns="54864" rIns="54864" tIns="27432" bIns="27432">
+            <a:noAutofit/>
+          </a:bodyPr>
+          <a:lstStyle/>
+          <a:p>
+            <a:pPr algn="ctr">
+              <a:lnSpc>
+                <a:spcPct val="100000"/>
+              </a:lnSpc>
+            </a:pPr>
+            <a:r>
+              <a:rPr sz="1400" b="0" i="0">
+                <a:solidFill>
+                  <a:srgbClr val="49272D"/>
+                </a:solidFill>
+              </a:rPr>
+              <a:t>사진을 넣어 주세요</a:t>
+            </a:r>
+          </a:p>
+        </p:txBody>
+      </p:sp>
+      <p:sp>
+        <p:nvSpPr>
+          <p:cNvPr id="4" name="장식"/>
+          <p:cNvSpPr/>
+          <p:nvPr/>
+        </p:nvSpPr>
+        <p:spPr>
+          <a:xfrm>
+            <a:off x="7558851" y="1234439"/>
+            <a:ext cx="3657508" cy="4526280"/>
+          </a:xfrm>
+          <a:prstGeom prst="roundRect">
+            <a:avLst>
+              <a:gd name="adj" fmla="val 4000"/>
+            </a:avLst>
+          </a:prstGeom>
+          <a:noFill/>
+          <a:ln w="9525">
+            <a:solidFill>
+              <a:srgbClr val="26231F"/>
+            </a:solidFill>
+          </a:ln>
+        </p:spPr>
+        <p:txBody>
+          <a:bodyPr rtlCol="0" anchor="ctr"/>
+          <a:lstStyle/>
+          <a:p>
+            <a:pPr algn="ctr"/>
+          </a:p>
+        </p:txBody>
+      </p:sp>
+      <p:sp>
+        <p:nvSpPr>
+          <p:cNvPr id="5" name="라벨"/>
+          <p:cNvSpPr txBox="1"/>
+          <p:nvPr/>
+        </p:nvSpPr>
+        <p:spPr>
+          <a:xfrm>
+            <a:off x="822960" y="2148840"/>
+            <a:ext cx="5608179" cy="274320"/>
           </a:xfrm>
           <a:prstGeom prst="rect">
             <a:avLst/>
           </a:prstGeom>
-        </p:spPr>
-      </p:pic>
+          <a:noFill/>
+        </p:spPr>
+        <p:txBody>
+          <a:bodyPr wrap="square" lIns="54864" rIns="54864" tIns="27432" bIns="27432" anchor="t">
+            <a:noAutofit/>
+          </a:bodyPr>
+          <a:lstStyle/>
+          <a:p>
+            <a:pPr algn="l">
+              <a:lnSpc>
+                <a:spcPct val="115000"/>
+              </a:lnSpc>
+            </a:pPr>
+            <a:r>
+              <a:rPr sz="1000" b="1" i="0" spc="250">
+                <a:solidFill>
+                  <a:srgbClr val="26231F"/>
+                </a:solidFill>
+              </a:rPr>
+              <a:t>FAMILY ALBUM</a:t>
+            </a:r>
+          </a:p>
+        </p:txBody>
+      </p:sp>
       <p:sp>
         <p:nvSpPr>
           <p:cNvPr id="2" name="Title 1"/>
@@ -3329,8 +3427,8 @@
         </p:nvSpPr>
         <p:spPr>
           <a:xfrm>
-            <a:off x="853418" y="2057400"/>
-            <a:ext cx="6095847" cy="1554480"/>
+            <a:off x="822960" y="2606040"/>
+            <a:ext cx="5608179" cy="1188720"/>
           </a:xfrm>
         </p:spPr>
         <p:txBody>
@@ -3345,9 +3443,9 @@
               </a:lnSpc>
             </a:pPr>
             <a:r>
-              <a:rPr sz="3600" b="1" i="0">
-                <a:solidFill>
-                  <a:srgbClr val="431920"/>
+              <a:rPr sz="4000" b="1" i="0">
+                <a:solidFill>
+                  <a:srgbClr val="26231F"/>
                 </a:solidFill>
               </a:rPr>
               <a:t>우리 가족을 소개합니다</a:t>
@@ -3357,14 +3455,14 @@
       </p:sp>
       <p:sp>
         <p:nvSpPr>
-          <p:cNvPr id="4" name="한 줄 문구"/>
+          <p:cNvPr id="6" name="한 줄 문구"/>
           <p:cNvSpPr txBox="1"/>
           <p:nvPr/>
         </p:nvSpPr>
         <p:spPr>
           <a:xfrm>
-            <a:off x="853418" y="3749039"/>
-            <a:ext cx="6095847" cy="822960"/>
+            <a:off x="822960" y="3886200"/>
+            <a:ext cx="5608179" cy="822960"/>
           </a:xfrm>
           <a:prstGeom prst="rect">
             <a:avLst/>
@@ -3383,9 +3481,9 @@
               </a:lnSpc>
             </a:pPr>
             <a:r>
-              <a:rPr sz="1700" b="0" i="1">
-                <a:solidFill>
-                  <a:srgbClr val="431920"/>
+              <a:rPr sz="1700" b="0" i="0">
+                <a:solidFill>
+                  <a:srgbClr val="26231F"/>
                 </a:solidFill>
               </a:rPr>
               <a:t>세배 끝나고 줄 서서 세뱃돈</a:t>
@@ -3395,14 +3493,14 @@
       </p:sp>
       <p:sp>
         <p:nvSpPr>
-          <p:cNvPr id="5" name="안내 문구"/>
+          <p:cNvPr id="7" name="안내 문구"/>
           <p:cNvSpPr txBox="1"/>
           <p:nvPr/>
         </p:nvSpPr>
         <p:spPr>
           <a:xfrm>
-            <a:off x="853418" y="4617720"/>
-            <a:ext cx="6095847" cy="914400"/>
+            <a:off x="822960" y="4754880"/>
+            <a:ext cx="5608179" cy="914400"/>
           </a:xfrm>
           <a:prstGeom prst="rect">
             <a:avLst/>
@@ -3423,10 +3521,10 @@
             <a:r>
               <a:rPr sz="1400" b="0" i="0">
                 <a:solidFill>
-                  <a:srgbClr val="666666"/>
-                </a:solidFill>
-              </a:rPr>
-              <a:t>3대 가족 · 2027. 00. 00</a:t>
+                  <a:srgbClr val="26231F"/>
+                </a:solidFill>
+              </a:rPr>
+              <a:t>3대 가족 · 날짜 입력</a:t>
             </a:r>
           </a:p>
         </p:txBody>
@@ -3465,14 +3563,14 @@
         </p:nvSpPr>
         <p:spPr>
           <a:xfrm>
-            <a:off x="-182880" y="6144768"/>
-            <a:ext cx="12557455" cy="731520"/>
-          </a:xfrm>
-          <a:prstGeom prst="wave">
+            <a:off x="0" y="6565392"/>
+            <a:ext cx="12191695" cy="292608"/>
+          </a:xfrm>
+          <a:prstGeom prst="rect">
             <a:avLst/>
           </a:prstGeom>
           <a:solidFill>
-            <a:srgbClr val="F0D1D6"/>
+            <a:srgbClr val="EBADB8"/>
           </a:solidFill>
           <a:ln>
             <a:noFill/>
@@ -3488,20 +3586,20 @@
       </p:sp>
       <p:sp>
         <p:nvSpPr>
-          <p:cNvPr id="4" name="장식"/>
+          <p:cNvPr id="4" name="포인트"/>
           <p:cNvSpPr/>
           <p:nvPr/>
         </p:nvSpPr>
         <p:spPr>
           <a:xfrm>
-            <a:off x="-182880" y="6400800"/>
-            <a:ext cx="12557455" cy="502920"/>
-          </a:xfrm>
-          <a:prstGeom prst="wave">
+            <a:off x="5958687" y="246888"/>
+            <a:ext cx="274320" cy="274320"/>
+          </a:xfrm>
+          <a:prstGeom prst="heart">
             <a:avLst/>
           </a:prstGeom>
           <a:solidFill>
-            <a:srgbClr val="8D3443"/>
+            <a:srgbClr val="E198A4"/>
           </a:solidFill>
           <a:ln>
             <a:noFill/>
@@ -3512,6 +3610,73 @@
           <a:lstStyle/>
           <a:p>
             <a:pPr algn="ctr"/>
+          </a:p>
+        </p:txBody>
+      </p:sp>
+      <p:sp>
+        <p:nvSpPr>
+          <p:cNvPr id="5" name="장식"/>
+          <p:cNvSpPr/>
+          <p:nvPr/>
+        </p:nvSpPr>
+        <p:spPr>
+          <a:xfrm>
+            <a:off x="5684367" y="1572768"/>
+            <a:ext cx="822960" cy="22860"/>
+          </a:xfrm>
+          <a:prstGeom prst="rect">
+            <a:avLst/>
+          </a:prstGeom>
+          <a:solidFill>
+            <a:srgbClr val="E198A4"/>
+          </a:solidFill>
+          <a:ln>
+            <a:noFill/>
+          </a:ln>
+        </p:spPr>
+        <p:txBody>
+          <a:bodyPr rtlCol="0" anchor="ctr"/>
+          <a:lstStyle/>
+          <a:p>
+            <a:pPr algn="ctr"/>
+          </a:p>
+        </p:txBody>
+      </p:sp>
+      <p:sp>
+        <p:nvSpPr>
+          <p:cNvPr id="6" name="상단 라벨"/>
+          <p:cNvSpPr txBox="1"/>
+          <p:nvPr/>
+        </p:nvSpPr>
+        <p:spPr>
+          <a:xfrm>
+            <a:off x="640080" y="182880"/>
+            <a:ext cx="3657600" cy="274320"/>
+          </a:xfrm>
+          <a:prstGeom prst="rect">
+            <a:avLst/>
+          </a:prstGeom>
+          <a:noFill/>
+        </p:spPr>
+        <p:txBody>
+          <a:bodyPr wrap="square" lIns="54864" rIns="54864" tIns="27432" bIns="27432" anchor="ctr">
+            <a:noAutofit/>
+          </a:bodyPr>
+          <a:lstStyle/>
+          <a:p>
+            <a:pPr algn="l">
+              <a:lnSpc>
+                <a:spcPct val="115000"/>
+              </a:lnSpc>
+            </a:pPr>
+            <a:r>
+              <a:rPr sz="800" b="1" i="0" spc="250">
+                <a:solidFill>
+                  <a:srgbClr val="8E8780"/>
+                </a:solidFill>
+              </a:rPr>
+              <a:t>FAMILY ALBUM</a:t>
+            </a:r>
           </a:p>
         </p:txBody>
       </p:sp>
@@ -3527,8 +3692,8 @@
         </p:nvSpPr>
         <p:spPr>
           <a:xfrm>
-            <a:off x="640080" y="457200"/>
-            <a:ext cx="9722815" cy="868680"/>
+            <a:off x="1371600" y="640080"/>
+            <a:ext cx="9448495" cy="868680"/>
           </a:xfrm>
         </p:spPr>
         <p:txBody>
@@ -3537,7 +3702,7 @@
           </a:bodyPr>
           <a:lstStyle/>
           <a:p>
-            <a:pPr algn="l">
+            <a:pPr algn="ctr">
               <a:lnSpc>
                 <a:spcPct val="105000"/>
               </a:lnSpc>
@@ -3545,7 +3710,7 @@
             <a:r>
               <a:rPr sz="3000" b="1" i="0">
                 <a:solidFill>
-                  <a:srgbClr val="431920"/>
+                  <a:srgbClr val="26231F"/>
                 </a:solidFill>
               </a:rPr>
               <a:t>가족 구성원</a:t>
@@ -3555,25 +3720,23 @@
       </p:sp>
       <p:sp>
         <p:nvSpPr>
-          <p:cNvPr id="5" name="사진 자리"/>
+          <p:cNvPr id="7" name="사진 자리"/>
           <p:cNvSpPr/>
           <p:nvPr/>
         </p:nvSpPr>
         <p:spPr>
           <a:xfrm>
-            <a:off x="777240" y="1554480"/>
+            <a:off x="777240" y="1783080"/>
             <a:ext cx="1353769" cy="1353769"/>
           </a:xfrm>
           <a:prstGeom prst="ellipse">
             <a:avLst/>
           </a:prstGeom>
           <a:solidFill>
-            <a:srgbClr val="F0D1D6"/>
+            <a:srgbClr val="F6D5DA"/>
           </a:solidFill>
           <a:ln w="19050">
-            <a:solidFill>
-              <a:srgbClr val="8D3443"/>
-            </a:solidFill>
+            <a:noFill/>
             <a:prstDash val="dash"/>
           </a:ln>
         </p:spPr>
@@ -3591,7 +3754,7 @@
             <a:r>
               <a:rPr sz="1200" b="0" i="0">
                 <a:solidFill>
-                  <a:srgbClr val="431920"/>
+                  <a:srgbClr val="8E8780"/>
                 </a:solidFill>
               </a:rPr>
               <a:t>사진</a:t>
@@ -3601,13 +3764,13 @@
       </p:sp>
       <p:sp>
         <p:nvSpPr>
-          <p:cNvPr id="6" name="TextBox 5"/>
+          <p:cNvPr id="8" name="TextBox 7"/>
           <p:cNvSpPr txBox="1"/>
           <p:nvPr/>
         </p:nvSpPr>
         <p:spPr>
           <a:xfrm>
-            <a:off x="640080" y="2999689"/>
+            <a:off x="640080" y="3228289"/>
             <a:ext cx="1628089" cy="411480"/>
           </a:xfrm>
           <a:prstGeom prst="rect">
@@ -3629,7 +3792,7 @@
             <a:r>
               <a:rPr sz="1600" b="1" i="0">
                 <a:solidFill>
-                  <a:srgbClr val="431920"/>
+                  <a:srgbClr val="49272D"/>
                 </a:solidFill>
               </a:rPr>
               <a:t>할아버지</a:t>
@@ -3639,13 +3802,13 @@
       </p:sp>
       <p:sp>
         <p:nvSpPr>
-          <p:cNvPr id="7" name="TextBox 6"/>
+          <p:cNvPr id="9" name="TextBox 8"/>
           <p:cNvSpPr txBox="1"/>
           <p:nvPr/>
         </p:nvSpPr>
         <p:spPr>
           <a:xfrm>
-            <a:off x="731519" y="3456889"/>
+            <a:off x="731519" y="3685489"/>
             <a:ext cx="1445209" cy="2486710"/>
           </a:xfrm>
           <a:prstGeom prst="rect">
@@ -3707,25 +3870,23 @@
       </p:sp>
       <p:sp>
         <p:nvSpPr>
-          <p:cNvPr id="8" name="사진 자리"/>
+          <p:cNvPr id="10" name="사진 자리"/>
           <p:cNvSpPr/>
           <p:nvPr/>
         </p:nvSpPr>
         <p:spPr>
           <a:xfrm>
-            <a:off x="2633929" y="1554480"/>
+            <a:off x="2633929" y="1783080"/>
             <a:ext cx="1353769" cy="1353769"/>
           </a:xfrm>
           <a:prstGeom prst="ellipse">
             <a:avLst/>
           </a:prstGeom>
           <a:solidFill>
-            <a:srgbClr val="F0D1D6"/>
+            <a:srgbClr val="F6D5DA"/>
           </a:solidFill>
           <a:ln w="19050">
-            <a:solidFill>
-              <a:srgbClr val="8D3443"/>
-            </a:solidFill>
+            <a:noFill/>
             <a:prstDash val="dash"/>
           </a:ln>
         </p:spPr>
@@ -3743,7 +3904,7 @@
             <a:r>
               <a:rPr sz="1200" b="0" i="0">
                 <a:solidFill>
-                  <a:srgbClr val="431920"/>
+                  <a:srgbClr val="8E8780"/>
                 </a:solidFill>
               </a:rPr>
               <a:t>사진</a:t>
@@ -3753,13 +3914,13 @@
       </p:sp>
       <p:sp>
         <p:nvSpPr>
-          <p:cNvPr id="9" name="TextBox 8"/>
+          <p:cNvPr id="11" name="TextBox 10"/>
           <p:cNvSpPr txBox="1"/>
           <p:nvPr/>
         </p:nvSpPr>
         <p:spPr>
           <a:xfrm>
-            <a:off x="2496769" y="2999689"/>
+            <a:off x="2496769" y="3228289"/>
             <a:ext cx="1628089" cy="411480"/>
           </a:xfrm>
           <a:prstGeom prst="rect">
@@ -3781,7 +3942,7 @@
             <a:r>
               <a:rPr sz="1600" b="1" i="0">
                 <a:solidFill>
-                  <a:srgbClr val="431920"/>
+                  <a:srgbClr val="49272D"/>
                 </a:solidFill>
               </a:rPr>
               <a:t>할머니</a:t>
@@ -3791,13 +3952,13 @@
       </p:sp>
       <p:sp>
         <p:nvSpPr>
-          <p:cNvPr id="10" name="TextBox 9"/>
+          <p:cNvPr id="12" name="TextBox 11"/>
           <p:cNvSpPr txBox="1"/>
           <p:nvPr/>
         </p:nvSpPr>
         <p:spPr>
           <a:xfrm>
-            <a:off x="2588209" y="3456889"/>
+            <a:off x="2588209" y="3685489"/>
             <a:ext cx="1445209" cy="2486710"/>
           </a:xfrm>
           <a:prstGeom prst="rect">
@@ -3859,25 +4020,23 @@
       </p:sp>
       <p:sp>
         <p:nvSpPr>
-          <p:cNvPr id="11" name="사진 자리"/>
+          <p:cNvPr id="13" name="사진 자리"/>
           <p:cNvSpPr/>
           <p:nvPr/>
         </p:nvSpPr>
         <p:spPr>
           <a:xfrm>
-            <a:off x="4490618" y="1554480"/>
+            <a:off x="4490618" y="1783080"/>
             <a:ext cx="1353769" cy="1353769"/>
           </a:xfrm>
           <a:prstGeom prst="ellipse">
             <a:avLst/>
           </a:prstGeom>
           <a:solidFill>
-            <a:srgbClr val="F0D1D6"/>
+            <a:srgbClr val="F6D5DA"/>
           </a:solidFill>
           <a:ln w="19050">
-            <a:solidFill>
-              <a:srgbClr val="8D3443"/>
-            </a:solidFill>
+            <a:noFill/>
             <a:prstDash val="dash"/>
           </a:ln>
         </p:spPr>
@@ -3895,7 +4054,7 @@
             <a:r>
               <a:rPr sz="1200" b="0" i="0">
                 <a:solidFill>
-                  <a:srgbClr val="431920"/>
+                  <a:srgbClr val="8E8780"/>
                 </a:solidFill>
               </a:rPr>
               <a:t>사진</a:t>
@@ -3905,13 +4064,13 @@
       </p:sp>
       <p:sp>
         <p:nvSpPr>
-          <p:cNvPr id="12" name="TextBox 11"/>
+          <p:cNvPr id="14" name="TextBox 13"/>
           <p:cNvSpPr txBox="1"/>
           <p:nvPr/>
         </p:nvSpPr>
         <p:spPr>
           <a:xfrm>
-            <a:off x="4353458" y="2999689"/>
+            <a:off x="4353458" y="3228289"/>
             <a:ext cx="1628089" cy="411480"/>
           </a:xfrm>
           <a:prstGeom prst="rect">
@@ -3933,7 +4092,7 @@
             <a:r>
               <a:rPr sz="1600" b="1" i="0">
                 <a:solidFill>
-                  <a:srgbClr val="431920"/>
+                  <a:srgbClr val="49272D"/>
                 </a:solidFill>
               </a:rPr>
               <a:t>아빠</a:t>
@@ -3943,13 +4102,13 @@
       </p:sp>
       <p:sp>
         <p:nvSpPr>
-          <p:cNvPr id="13" name="TextBox 12"/>
+          <p:cNvPr id="15" name="TextBox 14"/>
           <p:cNvSpPr txBox="1"/>
           <p:nvPr/>
         </p:nvSpPr>
         <p:spPr>
           <a:xfrm>
-            <a:off x="4444898" y="3456889"/>
+            <a:off x="4444898" y="3685489"/>
             <a:ext cx="1445209" cy="2486710"/>
           </a:xfrm>
           <a:prstGeom prst="rect">
@@ -4011,25 +4170,23 @@
       </p:sp>
       <p:sp>
         <p:nvSpPr>
-          <p:cNvPr id="14" name="사진 자리"/>
+          <p:cNvPr id="16" name="사진 자리"/>
           <p:cNvSpPr/>
           <p:nvPr/>
         </p:nvSpPr>
         <p:spPr>
           <a:xfrm>
-            <a:off x="6347307" y="1554480"/>
+            <a:off x="6347307" y="1783080"/>
             <a:ext cx="1353769" cy="1353769"/>
           </a:xfrm>
           <a:prstGeom prst="ellipse">
             <a:avLst/>
           </a:prstGeom>
           <a:solidFill>
-            <a:srgbClr val="F0D1D6"/>
+            <a:srgbClr val="F6D5DA"/>
           </a:solidFill>
           <a:ln w="19050">
-            <a:solidFill>
-              <a:srgbClr val="8D3443"/>
-            </a:solidFill>
+            <a:noFill/>
             <a:prstDash val="dash"/>
           </a:ln>
         </p:spPr>
@@ -4047,7 +4204,7 @@
             <a:r>
               <a:rPr sz="1200" b="0" i="0">
                 <a:solidFill>
-                  <a:srgbClr val="431920"/>
+                  <a:srgbClr val="8E8780"/>
                 </a:solidFill>
               </a:rPr>
               <a:t>사진</a:t>
@@ -4057,13 +4214,13 @@
       </p:sp>
       <p:sp>
         <p:nvSpPr>
-          <p:cNvPr id="15" name="TextBox 14"/>
+          <p:cNvPr id="17" name="TextBox 16"/>
           <p:cNvSpPr txBox="1"/>
           <p:nvPr/>
         </p:nvSpPr>
         <p:spPr>
           <a:xfrm>
-            <a:off x="6210147" y="2999689"/>
+            <a:off x="6210147" y="3228289"/>
             <a:ext cx="1628089" cy="411480"/>
           </a:xfrm>
           <a:prstGeom prst="rect">
@@ -4085,7 +4242,7 @@
             <a:r>
               <a:rPr sz="1600" b="1" i="0">
                 <a:solidFill>
-                  <a:srgbClr val="431920"/>
+                  <a:srgbClr val="49272D"/>
                 </a:solidFill>
               </a:rPr>
               <a:t>엄마</a:t>
@@ -4095,13 +4252,13 @@
       </p:sp>
       <p:sp>
         <p:nvSpPr>
-          <p:cNvPr id="16" name="TextBox 15"/>
+          <p:cNvPr id="18" name="TextBox 17"/>
           <p:cNvSpPr txBox="1"/>
           <p:nvPr/>
         </p:nvSpPr>
         <p:spPr>
           <a:xfrm>
-            <a:off x="6301587" y="3456889"/>
+            <a:off x="6301587" y="3685489"/>
             <a:ext cx="1445209" cy="2486710"/>
           </a:xfrm>
           <a:prstGeom prst="rect">
@@ -4163,25 +4320,23 @@
       </p:sp>
       <p:sp>
         <p:nvSpPr>
-          <p:cNvPr id="17" name="사진 자리"/>
+          <p:cNvPr id="19" name="사진 자리"/>
           <p:cNvSpPr/>
           <p:nvPr/>
         </p:nvSpPr>
         <p:spPr>
           <a:xfrm>
-            <a:off x="8203996" y="1554480"/>
+            <a:off x="8203996" y="1783080"/>
             <a:ext cx="1353769" cy="1353769"/>
           </a:xfrm>
           <a:prstGeom prst="ellipse">
             <a:avLst/>
           </a:prstGeom>
           <a:solidFill>
-            <a:srgbClr val="F0D1D6"/>
+            <a:srgbClr val="F6D5DA"/>
           </a:solidFill>
           <a:ln w="19050">
-            <a:solidFill>
-              <a:srgbClr val="8D3443"/>
-            </a:solidFill>
+            <a:noFill/>
             <a:prstDash val="dash"/>
           </a:ln>
         </p:spPr>
@@ -4199,7 +4354,7 @@
             <a:r>
               <a:rPr sz="1200" b="0" i="0">
                 <a:solidFill>
-                  <a:srgbClr val="431920"/>
+                  <a:srgbClr val="8E8780"/>
                 </a:solidFill>
               </a:rPr>
               <a:t>사진</a:t>
@@ -4209,13 +4364,13 @@
       </p:sp>
       <p:sp>
         <p:nvSpPr>
-          <p:cNvPr id="18" name="TextBox 17"/>
+          <p:cNvPr id="20" name="TextBox 19"/>
           <p:cNvSpPr txBox="1"/>
           <p:nvPr/>
         </p:nvSpPr>
         <p:spPr>
           <a:xfrm>
-            <a:off x="8066836" y="2999689"/>
+            <a:off x="8066836" y="3228289"/>
             <a:ext cx="1628089" cy="411480"/>
           </a:xfrm>
           <a:prstGeom prst="rect">
@@ -4237,7 +4392,7 @@
             <a:r>
               <a:rPr sz="1600" b="1" i="0">
                 <a:solidFill>
-                  <a:srgbClr val="431920"/>
+                  <a:srgbClr val="49272D"/>
                 </a:solidFill>
               </a:rPr>
               <a:t>큰아이</a:t>
@@ -4247,13 +4402,13 @@
       </p:sp>
       <p:sp>
         <p:nvSpPr>
-          <p:cNvPr id="19" name="TextBox 18"/>
+          <p:cNvPr id="21" name="TextBox 20"/>
           <p:cNvSpPr txBox="1"/>
           <p:nvPr/>
         </p:nvSpPr>
         <p:spPr>
           <a:xfrm>
-            <a:off x="8158276" y="3456889"/>
+            <a:off x="8158276" y="3685489"/>
             <a:ext cx="1445209" cy="2486710"/>
           </a:xfrm>
           <a:prstGeom prst="rect">
@@ -4315,25 +4470,23 @@
       </p:sp>
       <p:sp>
         <p:nvSpPr>
-          <p:cNvPr id="20" name="사진 자리"/>
+          <p:cNvPr id="22" name="사진 자리"/>
           <p:cNvSpPr/>
           <p:nvPr/>
         </p:nvSpPr>
         <p:spPr>
           <a:xfrm>
-            <a:off x="10060686" y="1554480"/>
+            <a:off x="10060686" y="1783080"/>
             <a:ext cx="1353769" cy="1353769"/>
           </a:xfrm>
           <a:prstGeom prst="ellipse">
             <a:avLst/>
           </a:prstGeom>
           <a:solidFill>
-            <a:srgbClr val="F0D1D6"/>
+            <a:srgbClr val="F6D5DA"/>
           </a:solidFill>
           <a:ln w="19050">
-            <a:solidFill>
-              <a:srgbClr val="8D3443"/>
-            </a:solidFill>
+            <a:noFill/>
             <a:prstDash val="dash"/>
           </a:ln>
         </p:spPr>
@@ -4351,7 +4504,7 @@
             <a:r>
               <a:rPr sz="1200" b="0" i="0">
                 <a:solidFill>
-                  <a:srgbClr val="431920"/>
+                  <a:srgbClr val="8E8780"/>
                 </a:solidFill>
               </a:rPr>
               <a:t>사진</a:t>
@@ -4361,13 +4514,13 @@
       </p:sp>
       <p:sp>
         <p:nvSpPr>
-          <p:cNvPr id="21" name="TextBox 20"/>
+          <p:cNvPr id="23" name="TextBox 22"/>
           <p:cNvSpPr txBox="1"/>
           <p:nvPr/>
         </p:nvSpPr>
         <p:spPr>
           <a:xfrm>
-            <a:off x="9923526" y="2999689"/>
+            <a:off x="9923526" y="3228289"/>
             <a:ext cx="1628089" cy="411480"/>
           </a:xfrm>
           <a:prstGeom prst="rect">
@@ -4389,7 +4542,7 @@
             <a:r>
               <a:rPr sz="1600" b="1" i="0">
                 <a:solidFill>
-                  <a:srgbClr val="431920"/>
+                  <a:srgbClr val="49272D"/>
                 </a:solidFill>
               </a:rPr>
               <a:t>작은아이</a:t>
@@ -4399,13 +4552,13 @@
       </p:sp>
       <p:sp>
         <p:nvSpPr>
-          <p:cNvPr id="22" name="TextBox 21"/>
+          <p:cNvPr id="24" name="TextBox 23"/>
           <p:cNvSpPr txBox="1"/>
           <p:nvPr/>
         </p:nvSpPr>
         <p:spPr>
           <a:xfrm>
-            <a:off x="10014965" y="3456889"/>
+            <a:off x="10014965" y="3685489"/>
             <a:ext cx="1445209" cy="2486710"/>
           </a:xfrm>
           <a:prstGeom prst="rect">
@@ -4499,14 +4652,14 @@
         </p:nvSpPr>
         <p:spPr>
           <a:xfrm>
-            <a:off x="-182880" y="6144768"/>
-            <a:ext cx="12557455" cy="731520"/>
-          </a:xfrm>
-          <a:prstGeom prst="wave">
+            <a:off x="0" y="6565392"/>
+            <a:ext cx="12191695" cy="292608"/>
+          </a:xfrm>
+          <a:prstGeom prst="rect">
             <a:avLst/>
           </a:prstGeom>
           <a:solidFill>
-            <a:srgbClr val="F0D1D6"/>
+            <a:srgbClr val="EBADB8"/>
           </a:solidFill>
           <a:ln>
             <a:noFill/>
@@ -4522,20 +4675,20 @@
       </p:sp>
       <p:sp>
         <p:nvSpPr>
-          <p:cNvPr id="4" name="장식"/>
+          <p:cNvPr id="4" name="포인트"/>
           <p:cNvSpPr/>
           <p:nvPr/>
         </p:nvSpPr>
         <p:spPr>
           <a:xfrm>
-            <a:off x="-182880" y="6400800"/>
-            <a:ext cx="12557455" cy="502920"/>
-          </a:xfrm>
-          <a:prstGeom prst="wave">
+            <a:off x="5958687" y="246888"/>
+            <a:ext cx="274320" cy="274320"/>
+          </a:xfrm>
+          <a:prstGeom prst="heart">
             <a:avLst/>
           </a:prstGeom>
           <a:solidFill>
-            <a:srgbClr val="8D3443"/>
+            <a:srgbClr val="E198A4"/>
           </a:solidFill>
           <a:ln>
             <a:noFill/>
@@ -4546,6 +4699,73 @@
           <a:lstStyle/>
           <a:p>
             <a:pPr algn="ctr"/>
+          </a:p>
+        </p:txBody>
+      </p:sp>
+      <p:sp>
+        <p:nvSpPr>
+          <p:cNvPr id="5" name="장식"/>
+          <p:cNvSpPr/>
+          <p:nvPr/>
+        </p:nvSpPr>
+        <p:spPr>
+          <a:xfrm>
+            <a:off x="5684367" y="1572768"/>
+            <a:ext cx="822960" cy="22860"/>
+          </a:xfrm>
+          <a:prstGeom prst="rect">
+            <a:avLst/>
+          </a:prstGeom>
+          <a:solidFill>
+            <a:srgbClr val="E198A4"/>
+          </a:solidFill>
+          <a:ln>
+            <a:noFill/>
+          </a:ln>
+        </p:spPr>
+        <p:txBody>
+          <a:bodyPr rtlCol="0" anchor="ctr"/>
+          <a:lstStyle/>
+          <a:p>
+            <a:pPr algn="ctr"/>
+          </a:p>
+        </p:txBody>
+      </p:sp>
+      <p:sp>
+        <p:nvSpPr>
+          <p:cNvPr id="6" name="상단 라벨"/>
+          <p:cNvSpPr txBox="1"/>
+          <p:nvPr/>
+        </p:nvSpPr>
+        <p:spPr>
+          <a:xfrm>
+            <a:off x="640080" y="182880"/>
+            <a:ext cx="3657600" cy="274320"/>
+          </a:xfrm>
+          <a:prstGeom prst="rect">
+            <a:avLst/>
+          </a:prstGeom>
+          <a:noFill/>
+        </p:spPr>
+        <p:txBody>
+          <a:bodyPr wrap="square" lIns="54864" rIns="54864" tIns="27432" bIns="27432" anchor="ctr">
+            <a:noAutofit/>
+          </a:bodyPr>
+          <a:lstStyle/>
+          <a:p>
+            <a:pPr algn="l">
+              <a:lnSpc>
+                <a:spcPct val="115000"/>
+              </a:lnSpc>
+            </a:pPr>
+            <a:r>
+              <a:rPr sz="800" b="1" i="0" spc="250">
+                <a:solidFill>
+                  <a:srgbClr val="8E8780"/>
+                </a:solidFill>
+              </a:rPr>
+              <a:t>FAMILY ALBUM</a:t>
+            </a:r>
           </a:p>
         </p:txBody>
       </p:sp>
@@ -4561,8 +4781,8 @@
         </p:nvSpPr>
         <p:spPr>
           <a:xfrm>
-            <a:off x="640080" y="457200"/>
-            <a:ext cx="9722815" cy="868680"/>
+            <a:off x="1371600" y="640080"/>
+            <a:ext cx="9448495" cy="868680"/>
           </a:xfrm>
         </p:spPr>
         <p:txBody>
@@ -4571,7 +4791,7 @@
           </a:bodyPr>
           <a:lstStyle/>
           <a:p>
-            <a:pPr algn="l">
+            <a:pPr algn="ctr">
               <a:lnSpc>
                 <a:spcPct val="105000"/>
               </a:lnSpc>
@@ -4579,7 +4799,7 @@
             <a:r>
               <a:rPr sz="3000" b="1" i="0">
                 <a:solidFill>
-                  <a:srgbClr val="431920"/>
+                  <a:srgbClr val="26231F"/>
                 </a:solidFill>
               </a:rPr>
               <a:t>우리 가족 이야기</a:t>
@@ -4589,20 +4809,20 @@
       </p:sp>
       <p:sp>
         <p:nvSpPr>
-          <p:cNvPr id="5" name="타임라인 선"/>
+          <p:cNvPr id="7" name="타임라인 선"/>
           <p:cNvSpPr/>
           <p:nvPr/>
         </p:nvSpPr>
         <p:spPr>
           <a:xfrm>
-            <a:off x="640080" y="3291840"/>
+            <a:off x="640080" y="3520440"/>
             <a:ext cx="10911535" cy="54864"/>
           </a:xfrm>
           <a:prstGeom prst="rect">
             <a:avLst/>
           </a:prstGeom>
           <a:solidFill>
-            <a:srgbClr val="F0D1D6"/>
+            <a:srgbClr val="F6D5DA"/>
           </a:solidFill>
           <a:ln>
             <a:noFill/>
@@ -4618,20 +4838,20 @@
       </p:sp>
       <p:sp>
         <p:nvSpPr>
-          <p:cNvPr id="6" name="때 1"/>
+          <p:cNvPr id="8" name="때 1"/>
           <p:cNvSpPr/>
           <p:nvPr/>
         </p:nvSpPr>
         <p:spPr>
           <a:xfrm>
-            <a:off x="1802853" y="3108960"/>
+            <a:off x="1802853" y="3337560"/>
             <a:ext cx="402336" cy="402336"/>
           </a:xfrm>
           <a:prstGeom prst="ellipse">
             <a:avLst/>
           </a:prstGeom>
           <a:solidFill>
-            <a:srgbClr val="8D3443"/>
+            <a:srgbClr val="E198A4"/>
           </a:solidFill>
           <a:ln w="38100">
             <a:solidFill>
@@ -4649,13 +4869,13 @@
       </p:sp>
       <p:sp>
         <p:nvSpPr>
-          <p:cNvPr id="7" name="TextBox 6"/>
+          <p:cNvPr id="9" name="TextBox 8"/>
           <p:cNvSpPr txBox="1"/>
           <p:nvPr/>
         </p:nvSpPr>
         <p:spPr>
           <a:xfrm>
-            <a:off x="685800" y="2468880"/>
+            <a:off x="685800" y="2697480"/>
             <a:ext cx="2636443" cy="457200"/>
           </a:xfrm>
           <a:prstGeom prst="rect">
@@ -4677,7 +4897,7 @@
             <a:r>
               <a:rPr sz="1600" b="1" i="0">
                 <a:solidFill>
-                  <a:srgbClr val="8D3443"/>
+                  <a:srgbClr val="E198A4"/>
                 </a:solidFill>
               </a:rPr>
               <a:t>할아버지 할머니의 이야기</a:t>
@@ -4687,13 +4907,13 @@
       </p:sp>
       <p:sp>
         <p:nvSpPr>
-          <p:cNvPr id="8" name="TextBox 7"/>
+          <p:cNvPr id="10" name="TextBox 9"/>
           <p:cNvSpPr txBox="1"/>
           <p:nvPr/>
         </p:nvSpPr>
         <p:spPr>
           <a:xfrm>
-            <a:off x="731519" y="3657600"/>
+            <a:off x="731519" y="3886200"/>
             <a:ext cx="2545003" cy="457200"/>
           </a:xfrm>
           <a:prstGeom prst="rect">
@@ -4715,7 +4935,7 @@
             <a:r>
               <a:rPr sz="1800" b="1" i="0">
                 <a:solidFill>
-                  <a:srgbClr val="431920"/>
+                  <a:srgbClr val="49272D"/>
                 </a:solidFill>
               </a:rPr>
               <a:t>뿌리</a:t>
@@ -4725,13 +4945,13 @@
       </p:sp>
       <p:sp>
         <p:nvSpPr>
-          <p:cNvPr id="9" name="TextBox 8"/>
+          <p:cNvPr id="11" name="TextBox 10"/>
           <p:cNvSpPr txBox="1"/>
           <p:nvPr/>
         </p:nvSpPr>
         <p:spPr>
           <a:xfrm>
-            <a:off x="731519" y="4160520"/>
+            <a:off x="731519" y="4389120"/>
             <a:ext cx="2545003" cy="1645920"/>
           </a:xfrm>
           <a:prstGeom prst="rect">
@@ -4753,7 +4973,7 @@
             <a:r>
               <a:rPr sz="1500" b="0" i="0">
                 <a:solidFill>
-                  <a:srgbClr val="2B2B2B"/>
+                  <a:srgbClr val="26231F"/>
                 </a:solidFill>
               </a:rPr>
               <a:t>가족의 시작을 적어요</a:t>
@@ -4763,20 +4983,20 @@
       </p:sp>
       <p:sp>
         <p:nvSpPr>
-          <p:cNvPr id="10" name="때 2"/>
+          <p:cNvPr id="12" name="때 2"/>
           <p:cNvSpPr/>
           <p:nvPr/>
         </p:nvSpPr>
         <p:spPr>
           <a:xfrm>
-            <a:off x="4530737" y="3108960"/>
+            <a:off x="4530737" y="3337560"/>
             <a:ext cx="402336" cy="402336"/>
           </a:xfrm>
           <a:prstGeom prst="ellipse">
             <a:avLst/>
           </a:prstGeom>
           <a:solidFill>
-            <a:srgbClr val="8D3443"/>
+            <a:srgbClr val="E198A4"/>
           </a:solidFill>
           <a:ln w="38100">
             <a:solidFill>
@@ -4794,13 +5014,13 @@
       </p:sp>
       <p:sp>
         <p:nvSpPr>
-          <p:cNvPr id="11" name="TextBox 10"/>
+          <p:cNvPr id="13" name="TextBox 12"/>
           <p:cNvSpPr txBox="1"/>
           <p:nvPr/>
         </p:nvSpPr>
         <p:spPr>
           <a:xfrm>
-            <a:off x="3413683" y="2468880"/>
+            <a:off x="3413683" y="2697480"/>
             <a:ext cx="2636443" cy="457200"/>
           </a:xfrm>
           <a:prstGeom prst="rect">
@@ -4822,7 +5042,7 @@
             <a:r>
               <a:rPr sz="1600" b="1" i="0">
                 <a:solidFill>
-                  <a:srgbClr val="8D3443"/>
+                  <a:srgbClr val="E198A4"/>
                 </a:solidFill>
               </a:rPr>
               <a:t>부모가 된 날</a:t>
@@ -4832,13 +5052,13 @@
       </p:sp>
       <p:sp>
         <p:nvSpPr>
-          <p:cNvPr id="12" name="TextBox 11"/>
+          <p:cNvPr id="14" name="TextBox 13"/>
           <p:cNvSpPr txBox="1"/>
           <p:nvPr/>
         </p:nvSpPr>
         <p:spPr>
           <a:xfrm>
-            <a:off x="3459403" y="3657600"/>
+            <a:off x="3459403" y="3886200"/>
             <a:ext cx="2545003" cy="457200"/>
           </a:xfrm>
           <a:prstGeom prst="rect">
@@ -4860,7 +5080,7 @@
             <a:r>
               <a:rPr sz="1800" b="1" i="0">
                 <a:solidFill>
-                  <a:srgbClr val="431920"/>
+                  <a:srgbClr val="49272D"/>
                 </a:solidFill>
               </a:rPr>
               <a:t>새로운 가지</a:t>
@@ -4870,13 +5090,13 @@
       </p:sp>
       <p:sp>
         <p:nvSpPr>
-          <p:cNvPr id="13" name="TextBox 12"/>
+          <p:cNvPr id="15" name="TextBox 14"/>
           <p:cNvSpPr txBox="1"/>
           <p:nvPr/>
         </p:nvSpPr>
         <p:spPr>
           <a:xfrm>
-            <a:off x="3459403" y="4160520"/>
+            <a:off x="3459403" y="4389120"/>
             <a:ext cx="2545003" cy="1645920"/>
           </a:xfrm>
           <a:prstGeom prst="rect">
@@ -4898,7 +5118,7 @@
             <a:r>
               <a:rPr sz="1500" b="0" i="0">
                 <a:solidFill>
-                  <a:srgbClr val="2B2B2B"/>
+                  <a:srgbClr val="26231F"/>
                 </a:solidFill>
               </a:rPr>
               <a:t>그날의 기억을 적어요</a:t>
@@ -4908,20 +5128,20 @@
       </p:sp>
       <p:sp>
         <p:nvSpPr>
-          <p:cNvPr id="14" name="때 3"/>
+          <p:cNvPr id="16" name="때 3"/>
           <p:cNvSpPr/>
           <p:nvPr/>
         </p:nvSpPr>
         <p:spPr>
           <a:xfrm>
-            <a:off x="7258621" y="3108960"/>
+            <a:off x="7258621" y="3337560"/>
             <a:ext cx="402336" cy="402336"/>
           </a:xfrm>
           <a:prstGeom prst="ellipse">
             <a:avLst/>
           </a:prstGeom>
           <a:solidFill>
-            <a:srgbClr val="8D3443"/>
+            <a:srgbClr val="E198A4"/>
           </a:solidFill>
           <a:ln w="38100">
             <a:solidFill>
@@ -4939,13 +5159,13 @@
       </p:sp>
       <p:sp>
         <p:nvSpPr>
-          <p:cNvPr id="15" name="TextBox 14"/>
+          <p:cNvPr id="17" name="TextBox 16"/>
           <p:cNvSpPr txBox="1"/>
           <p:nvPr/>
         </p:nvSpPr>
         <p:spPr>
           <a:xfrm>
-            <a:off x="6141567" y="2468880"/>
+            <a:off x="6141567" y="2697480"/>
             <a:ext cx="2636443" cy="457200"/>
           </a:xfrm>
           <a:prstGeom prst="rect">
@@ -4967,7 +5187,7 @@
             <a:r>
               <a:rPr sz="1600" b="1" i="0">
                 <a:solidFill>
-                  <a:srgbClr val="8D3443"/>
+                  <a:srgbClr val="E198A4"/>
                 </a:solidFill>
               </a:rPr>
               <a:t>온 가족 모임</a:t>
@@ -4977,13 +5197,13 @@
       </p:sp>
       <p:sp>
         <p:nvSpPr>
-          <p:cNvPr id="16" name="TextBox 15"/>
+          <p:cNvPr id="18" name="TextBox 17"/>
           <p:cNvSpPr txBox="1"/>
           <p:nvPr/>
         </p:nvSpPr>
         <p:spPr>
           <a:xfrm>
-            <a:off x="6187287" y="3657600"/>
+            <a:off x="6187287" y="3886200"/>
             <a:ext cx="2545003" cy="457200"/>
           </a:xfrm>
           <a:prstGeom prst="rect">
@@ -5005,7 +5225,7 @@
             <a:r>
               <a:rPr sz="1800" b="1" i="0">
                 <a:solidFill>
-                  <a:srgbClr val="431920"/>
+                  <a:srgbClr val="49272D"/>
                 </a:solidFill>
               </a:rPr>
               <a:t>한자리에 모인 날</a:t>
@@ -5015,13 +5235,13 @@
       </p:sp>
       <p:sp>
         <p:nvSpPr>
-          <p:cNvPr id="17" name="TextBox 16"/>
+          <p:cNvPr id="19" name="TextBox 18"/>
           <p:cNvSpPr txBox="1"/>
           <p:nvPr/>
         </p:nvSpPr>
         <p:spPr>
           <a:xfrm>
-            <a:off x="6187287" y="4160520"/>
+            <a:off x="6187287" y="4389120"/>
             <a:ext cx="2545003" cy="1645920"/>
           </a:xfrm>
           <a:prstGeom prst="rect">
@@ -5043,7 +5263,7 @@
             <a:r>
               <a:rPr sz="1500" b="0" i="0">
                 <a:solidFill>
-                  <a:srgbClr val="2B2B2B"/>
+                  <a:srgbClr val="26231F"/>
                 </a:solidFill>
               </a:rPr>
               <a:t>가장 즐거웠던 명절</a:t>
@@ -5053,20 +5273,20 @@
       </p:sp>
       <p:sp>
         <p:nvSpPr>
-          <p:cNvPr id="18" name="때 4"/>
+          <p:cNvPr id="20" name="때 4"/>
           <p:cNvSpPr/>
           <p:nvPr/>
         </p:nvSpPr>
         <p:spPr>
           <a:xfrm>
-            <a:off x="9986505" y="3108960"/>
+            <a:off x="9986505" y="3337560"/>
             <a:ext cx="402336" cy="402336"/>
           </a:xfrm>
           <a:prstGeom prst="ellipse">
             <a:avLst/>
           </a:prstGeom>
           <a:solidFill>
-            <a:srgbClr val="8D3443"/>
+            <a:srgbClr val="E198A4"/>
           </a:solidFill>
           <a:ln w="38100">
             <a:solidFill>
@@ -5084,13 +5304,13 @@
       </p:sp>
       <p:sp>
         <p:nvSpPr>
-          <p:cNvPr id="19" name="TextBox 18"/>
+          <p:cNvPr id="21" name="TextBox 20"/>
           <p:cNvSpPr txBox="1"/>
           <p:nvPr/>
         </p:nvSpPr>
         <p:spPr>
           <a:xfrm>
-            <a:off x="8869451" y="2468880"/>
+            <a:off x="8869451" y="2697480"/>
             <a:ext cx="2636443" cy="457200"/>
           </a:xfrm>
           <a:prstGeom prst="rect">
@@ -5112,7 +5332,7 @@
             <a:r>
               <a:rPr sz="1600" b="1" i="0">
                 <a:solidFill>
-                  <a:srgbClr val="8D3443"/>
+                  <a:srgbClr val="E198A4"/>
                 </a:solidFill>
               </a:rPr>
               <a:t>지금</a:t>
@@ -5122,13 +5342,13 @@
       </p:sp>
       <p:sp>
         <p:nvSpPr>
-          <p:cNvPr id="20" name="TextBox 19"/>
+          <p:cNvPr id="22" name="TextBox 21"/>
           <p:cNvSpPr txBox="1"/>
           <p:nvPr/>
         </p:nvSpPr>
         <p:spPr>
           <a:xfrm>
-            <a:off x="8915171" y="3657600"/>
+            <a:off x="8915171" y="3886200"/>
             <a:ext cx="2545003" cy="457200"/>
           </a:xfrm>
           <a:prstGeom prst="rect">
@@ -5150,7 +5370,7 @@
             <a:r>
               <a:rPr sz="1800" b="1" i="0">
                 <a:solidFill>
-                  <a:srgbClr val="431920"/>
+                  <a:srgbClr val="49272D"/>
                 </a:solidFill>
               </a:rPr>
               <a:t>오늘의 우리</a:t>
@@ -5160,13 +5380,13 @@
       </p:sp>
       <p:sp>
         <p:nvSpPr>
-          <p:cNvPr id="21" name="TextBox 20"/>
+          <p:cNvPr id="23" name="TextBox 22"/>
           <p:cNvSpPr txBox="1"/>
           <p:nvPr/>
         </p:nvSpPr>
         <p:spPr>
           <a:xfrm>
-            <a:off x="8915171" y="4160520"/>
+            <a:off x="8915171" y="4389120"/>
             <a:ext cx="2545003" cy="1645920"/>
           </a:xfrm>
           <a:prstGeom prst="rect">
@@ -5188,7 +5408,7 @@
             <a:r>
               <a:rPr sz="1500" b="0" i="0">
                 <a:solidFill>
-                  <a:srgbClr val="2B2B2B"/>
+                  <a:srgbClr val="26231F"/>
                 </a:solidFill>
               </a:rPr>
               <a:t>요즘 우리 이야기</a:t>
@@ -5230,14 +5450,14 @@
         </p:nvSpPr>
         <p:spPr>
           <a:xfrm>
-            <a:off x="-182880" y="6144768"/>
-            <a:ext cx="12557455" cy="731520"/>
-          </a:xfrm>
-          <a:prstGeom prst="wave">
+            <a:off x="0" y="6565392"/>
+            <a:ext cx="12191695" cy="292608"/>
+          </a:xfrm>
+          <a:prstGeom prst="rect">
             <a:avLst/>
           </a:prstGeom>
           <a:solidFill>
-            <a:srgbClr val="F0D1D6"/>
+            <a:srgbClr val="EBADB8"/>
           </a:solidFill>
           <a:ln>
             <a:noFill/>
@@ -5253,20 +5473,20 @@
       </p:sp>
       <p:sp>
         <p:nvSpPr>
-          <p:cNvPr id="4" name="장식"/>
+          <p:cNvPr id="4" name="포인트"/>
           <p:cNvSpPr/>
           <p:nvPr/>
         </p:nvSpPr>
         <p:spPr>
           <a:xfrm>
-            <a:off x="-182880" y="6400800"/>
-            <a:ext cx="12557455" cy="502920"/>
-          </a:xfrm>
-          <a:prstGeom prst="wave">
+            <a:off x="5958687" y="246888"/>
+            <a:ext cx="274320" cy="274320"/>
+          </a:xfrm>
+          <a:prstGeom prst="heart">
             <a:avLst/>
           </a:prstGeom>
           <a:solidFill>
-            <a:srgbClr val="8D3443"/>
+            <a:srgbClr val="E198A4"/>
           </a:solidFill>
           <a:ln>
             <a:noFill/>
@@ -5277,6 +5497,73 @@
           <a:lstStyle/>
           <a:p>
             <a:pPr algn="ctr"/>
+          </a:p>
+        </p:txBody>
+      </p:sp>
+      <p:sp>
+        <p:nvSpPr>
+          <p:cNvPr id="5" name="장식"/>
+          <p:cNvSpPr/>
+          <p:nvPr/>
+        </p:nvSpPr>
+        <p:spPr>
+          <a:xfrm>
+            <a:off x="5684367" y="1572768"/>
+            <a:ext cx="822960" cy="22860"/>
+          </a:xfrm>
+          <a:prstGeom prst="rect">
+            <a:avLst/>
+          </a:prstGeom>
+          <a:solidFill>
+            <a:srgbClr val="E198A4"/>
+          </a:solidFill>
+          <a:ln>
+            <a:noFill/>
+          </a:ln>
+        </p:spPr>
+        <p:txBody>
+          <a:bodyPr rtlCol="0" anchor="ctr"/>
+          <a:lstStyle/>
+          <a:p>
+            <a:pPr algn="ctr"/>
+          </a:p>
+        </p:txBody>
+      </p:sp>
+      <p:sp>
+        <p:nvSpPr>
+          <p:cNvPr id="6" name="상단 라벨"/>
+          <p:cNvSpPr txBox="1"/>
+          <p:nvPr/>
+        </p:nvSpPr>
+        <p:spPr>
+          <a:xfrm>
+            <a:off x="640080" y="182880"/>
+            <a:ext cx="3657600" cy="274320"/>
+          </a:xfrm>
+          <a:prstGeom prst="rect">
+            <a:avLst/>
+          </a:prstGeom>
+          <a:noFill/>
+        </p:spPr>
+        <p:txBody>
+          <a:bodyPr wrap="square" lIns="54864" rIns="54864" tIns="27432" bIns="27432" anchor="ctr">
+            <a:noAutofit/>
+          </a:bodyPr>
+          <a:lstStyle/>
+          <a:p>
+            <a:pPr algn="l">
+              <a:lnSpc>
+                <a:spcPct val="115000"/>
+              </a:lnSpc>
+            </a:pPr>
+            <a:r>
+              <a:rPr sz="800" b="1" i="0" spc="250">
+                <a:solidFill>
+                  <a:srgbClr val="8E8780"/>
+                </a:solidFill>
+              </a:rPr>
+              <a:t>FAMILY ALBUM</a:t>
+            </a:r>
           </a:p>
         </p:txBody>
       </p:sp>
@@ -5292,8 +5579,8 @@
         </p:nvSpPr>
         <p:spPr>
           <a:xfrm>
-            <a:off x="640080" y="457200"/>
-            <a:ext cx="9722815" cy="868680"/>
+            <a:off x="1371600" y="640080"/>
+            <a:ext cx="9448495" cy="868680"/>
           </a:xfrm>
         </p:spPr>
         <p:txBody>
@@ -5302,7 +5589,7 @@
           </a:bodyPr>
           <a:lstStyle/>
           <a:p>
-            <a:pPr algn="l">
+            <a:pPr algn="ctr">
               <a:lnSpc>
                 <a:spcPct val="105000"/>
               </a:lnSpc>
@@ -5310,7 +5597,7 @@
             <a:r>
               <a:rPr sz="3000" b="1" i="0">
                 <a:solidFill>
-                  <a:srgbClr val="431920"/>
+                  <a:srgbClr val="26231F"/>
                 </a:solidFill>
               </a:rPr>
               <a:t>우리 가족의 약속</a:t>
@@ -5320,26 +5607,24 @@
       </p:sp>
       <p:sp>
         <p:nvSpPr>
-          <p:cNvPr id="5" name="줄 1"/>
+          <p:cNvPr id="7" name="줄 1"/>
           <p:cNvSpPr/>
           <p:nvPr/>
         </p:nvSpPr>
         <p:spPr>
           <a:xfrm>
-            <a:off x="640080" y="1554480"/>
+            <a:off x="640080" y="1783080"/>
             <a:ext cx="10911535" cy="1005840"/>
           </a:xfrm>
           <a:prstGeom prst="roundRect">
             <a:avLst>
-              <a:gd name="adj" fmla="val 8000"/>
+              <a:gd name="adj" fmla="val 7000"/>
             </a:avLst>
           </a:prstGeom>
-          <a:solidFill>
-            <a:srgbClr val="F9F0F2"/>
-          </a:solidFill>
-          <a:ln w="12700">
+          <a:noFill/>
+          <a:ln w="15875">
             <a:solidFill>
-              <a:srgbClr val="F0D1D6"/>
+              <a:srgbClr val="E198A4"/>
             </a:solidFill>
           </a:ln>
         </p:spPr>
@@ -5353,57 +5638,14 @@
       </p:sp>
       <p:sp>
         <p:nvSpPr>
-          <p:cNvPr id="6" name="번호 1"/>
-          <p:cNvSpPr/>
-          <p:nvPr/>
-        </p:nvSpPr>
-        <p:spPr>
-          <a:xfrm>
-            <a:off x="822959" y="1828800"/>
-            <a:ext cx="457200" cy="457200"/>
-          </a:xfrm>
-          <a:prstGeom prst="ellipse">
-            <a:avLst/>
-          </a:prstGeom>
-          <a:solidFill>
-            <a:srgbClr val="8D3443"/>
-          </a:solidFill>
-          <a:ln>
-            <a:noFill/>
-          </a:ln>
-        </p:spPr>
-        <p:txBody>
-          <a:bodyPr rtlCol="0" anchor="ctr" wrap="square" lIns="54864" rIns="54864" tIns="27432" bIns="27432">
-            <a:noAutofit/>
-          </a:bodyPr>
-          <a:lstStyle/>
-          <a:p>
-            <a:pPr algn="ctr">
-              <a:lnSpc>
-                <a:spcPct val="100000"/>
-              </a:lnSpc>
-            </a:pPr>
-            <a:r>
-              <a:rPr sz="1600" b="1" i="0">
-                <a:solidFill>
-                  <a:srgbClr val="FFFFFF"/>
-                </a:solidFill>
-              </a:rPr>
-              <a:t>1</a:t>
-            </a:r>
-          </a:p>
-        </p:txBody>
-      </p:sp>
-      <p:sp>
-        <p:nvSpPr>
-          <p:cNvPr id="7" name="TextBox 6"/>
+          <p:cNvPr id="8" name="번호 1"/>
           <p:cNvSpPr txBox="1"/>
           <p:nvPr/>
         </p:nvSpPr>
         <p:spPr>
           <a:xfrm>
-            <a:off x="1508760" y="1600200"/>
-            <a:ext cx="2743200" cy="914400"/>
+            <a:off x="731519" y="2011680"/>
+            <a:ext cx="914400" cy="548640"/>
           </a:xfrm>
           <a:prstGeom prst="rect">
             <a:avLst/>
@@ -5422,26 +5664,26 @@
               </a:lnSpc>
             </a:pPr>
             <a:r>
-              <a:rPr sz="1800" b="1" i="0">
-                <a:solidFill>
-                  <a:srgbClr val="431920"/>
-                </a:solidFill>
-              </a:rPr>
-              <a:t>약속 1</a:t>
-            </a:r>
-          </a:p>
-        </p:txBody>
-      </p:sp>
-      <p:sp>
-        <p:nvSpPr>
-          <p:cNvPr id="8" name="TextBox 7"/>
+              <a:rPr sz="2400" b="1" i="0">
+                <a:solidFill>
+                  <a:srgbClr val="E198A4"/>
+                </a:solidFill>
+              </a:rPr>
+              <a:t>01</a:t>
+            </a:r>
+          </a:p>
+        </p:txBody>
+      </p:sp>
+      <p:sp>
+        <p:nvSpPr>
+          <p:cNvPr id="9" name="TextBox 8"/>
           <p:cNvSpPr txBox="1"/>
           <p:nvPr/>
         </p:nvSpPr>
         <p:spPr>
           <a:xfrm>
-            <a:off x="4297680" y="1600200"/>
-            <a:ext cx="7071055" cy="914400"/>
+            <a:off x="1508760" y="1828800"/>
+            <a:ext cx="2743200" cy="914400"/>
           </a:xfrm>
           <a:prstGeom prst="rect">
             <a:avLst/>
@@ -5460,102 +5702,26 @@
               </a:lnSpc>
             </a:pPr>
             <a:r>
-              <a:rPr sz="1700" b="0" i="0">
-                <a:solidFill>
-                  <a:srgbClr val="2B2B2B"/>
-                </a:solidFill>
-              </a:rPr>
-              <a:t>명절에는 모두 한자리에 모이기</a:t>
-            </a:r>
-          </a:p>
-        </p:txBody>
-      </p:sp>
-      <p:sp>
-        <p:nvSpPr>
-          <p:cNvPr id="9" name="줄 2"/>
-          <p:cNvSpPr/>
-          <p:nvPr/>
-        </p:nvSpPr>
-        <p:spPr>
-          <a:xfrm>
-            <a:off x="640080" y="2697480"/>
-            <a:ext cx="10911535" cy="1005840"/>
-          </a:xfrm>
-          <a:prstGeom prst="roundRect">
-            <a:avLst>
-              <a:gd name="adj" fmla="val 8000"/>
-            </a:avLst>
-          </a:prstGeom>
-          <a:solidFill>
-            <a:srgbClr val="F9F0F2"/>
-          </a:solidFill>
-          <a:ln w="12700">
-            <a:solidFill>
-              <a:srgbClr val="F0D1D6"/>
-            </a:solidFill>
-          </a:ln>
-        </p:spPr>
-        <p:txBody>
-          <a:bodyPr rtlCol="0" anchor="ctr"/>
-          <a:lstStyle/>
-          <a:p>
-            <a:pPr algn="ctr"/>
-          </a:p>
-        </p:txBody>
-      </p:sp>
-      <p:sp>
-        <p:nvSpPr>
-          <p:cNvPr id="10" name="번호 2"/>
-          <p:cNvSpPr/>
-          <p:nvPr/>
-        </p:nvSpPr>
-        <p:spPr>
-          <a:xfrm>
-            <a:off x="822959" y="2971800"/>
-            <a:ext cx="457200" cy="457200"/>
-          </a:xfrm>
-          <a:prstGeom prst="ellipse">
-            <a:avLst/>
-          </a:prstGeom>
-          <a:solidFill>
-            <a:srgbClr val="8D3443"/>
-          </a:solidFill>
-          <a:ln>
-            <a:noFill/>
-          </a:ln>
-        </p:spPr>
-        <p:txBody>
-          <a:bodyPr rtlCol="0" anchor="ctr" wrap="square" lIns="54864" rIns="54864" tIns="27432" bIns="27432">
-            <a:noAutofit/>
-          </a:bodyPr>
-          <a:lstStyle/>
-          <a:p>
-            <a:pPr algn="ctr">
-              <a:lnSpc>
-                <a:spcPct val="100000"/>
-              </a:lnSpc>
-            </a:pPr>
-            <a:r>
-              <a:rPr sz="1600" b="1" i="0">
-                <a:solidFill>
-                  <a:srgbClr val="FFFFFF"/>
-                </a:solidFill>
-              </a:rPr>
-              <a:t>2</a:t>
-            </a:r>
-          </a:p>
-        </p:txBody>
-      </p:sp>
-      <p:sp>
-        <p:nvSpPr>
-          <p:cNvPr id="11" name="TextBox 10"/>
+              <a:rPr sz="1800" b="1" i="0">
+                <a:solidFill>
+                  <a:srgbClr val="49272D"/>
+                </a:solidFill>
+              </a:rPr>
+              <a:t>약속 1</a:t>
+            </a:r>
+          </a:p>
+        </p:txBody>
+      </p:sp>
+      <p:sp>
+        <p:nvSpPr>
+          <p:cNvPr id="10" name="TextBox 9"/>
           <p:cNvSpPr txBox="1"/>
           <p:nvPr/>
         </p:nvSpPr>
         <p:spPr>
           <a:xfrm>
-            <a:off x="1508760" y="2743200"/>
-            <a:ext cx="2743200" cy="914400"/>
+            <a:off x="4297680" y="1828800"/>
+            <a:ext cx="7071055" cy="914400"/>
           </a:xfrm>
           <a:prstGeom prst="rect">
             <a:avLst/>
@@ -5574,26 +5740,57 @@
               </a:lnSpc>
             </a:pPr>
             <a:r>
-              <a:rPr sz="1800" b="1" i="0">
-                <a:solidFill>
-                  <a:srgbClr val="431920"/>
-                </a:solidFill>
-              </a:rPr>
-              <a:t>약속 2</a:t>
-            </a:r>
-          </a:p>
-        </p:txBody>
-      </p:sp>
-      <p:sp>
-        <p:nvSpPr>
-          <p:cNvPr id="12" name="TextBox 11"/>
+              <a:rPr sz="1700" b="0" i="0">
+                <a:solidFill>
+                  <a:srgbClr val="26231F"/>
+                </a:solidFill>
+              </a:rPr>
+              <a:t>명절에는 모두 한자리에 모이기</a:t>
+            </a:r>
+          </a:p>
+        </p:txBody>
+      </p:sp>
+      <p:sp>
+        <p:nvSpPr>
+          <p:cNvPr id="11" name="줄 2"/>
+          <p:cNvSpPr/>
+          <p:nvPr/>
+        </p:nvSpPr>
+        <p:spPr>
+          <a:xfrm>
+            <a:off x="640080" y="2926080"/>
+            <a:ext cx="10911535" cy="1005840"/>
+          </a:xfrm>
+          <a:prstGeom prst="roundRect">
+            <a:avLst>
+              <a:gd name="adj" fmla="val 7000"/>
+            </a:avLst>
+          </a:prstGeom>
+          <a:noFill/>
+          <a:ln w="15875">
+            <a:solidFill>
+              <a:srgbClr val="E198A4"/>
+            </a:solidFill>
+          </a:ln>
+        </p:spPr>
+        <p:txBody>
+          <a:bodyPr rtlCol="0" anchor="ctr"/>
+          <a:lstStyle/>
+          <a:p>
+            <a:pPr algn="ctr"/>
+          </a:p>
+        </p:txBody>
+      </p:sp>
+      <p:sp>
+        <p:nvSpPr>
+          <p:cNvPr id="12" name="번호 2"/>
           <p:cNvSpPr txBox="1"/>
           <p:nvPr/>
         </p:nvSpPr>
         <p:spPr>
           <a:xfrm>
-            <a:off x="4297680" y="2743200"/>
-            <a:ext cx="7071055" cy="914400"/>
+            <a:off x="731519" y="3154680"/>
+            <a:ext cx="914400" cy="548640"/>
           </a:xfrm>
           <a:prstGeom prst="rect">
             <a:avLst/>
@@ -5612,101 +5809,25 @@
               </a:lnSpc>
             </a:pPr>
             <a:r>
-              <a:rPr sz="1700" b="0" i="0">
-                <a:solidFill>
-                  <a:srgbClr val="2B2B2B"/>
-                </a:solidFill>
-              </a:rPr>
-              <a:t>어른께 먼저 안부 전하기</a:t>
-            </a:r>
-          </a:p>
-        </p:txBody>
-      </p:sp>
-      <p:sp>
-        <p:nvSpPr>
-          <p:cNvPr id="13" name="줄 3"/>
-          <p:cNvSpPr/>
-          <p:nvPr/>
-        </p:nvSpPr>
-        <p:spPr>
-          <a:xfrm>
-            <a:off x="640080" y="3840480"/>
-            <a:ext cx="10911535" cy="1005840"/>
-          </a:xfrm>
-          <a:prstGeom prst="roundRect">
-            <a:avLst>
-              <a:gd name="adj" fmla="val 8000"/>
-            </a:avLst>
-          </a:prstGeom>
-          <a:solidFill>
-            <a:srgbClr val="F9F0F2"/>
-          </a:solidFill>
-          <a:ln w="12700">
-            <a:solidFill>
-              <a:srgbClr val="F0D1D6"/>
-            </a:solidFill>
-          </a:ln>
-        </p:spPr>
-        <p:txBody>
-          <a:bodyPr rtlCol="0" anchor="ctr"/>
-          <a:lstStyle/>
-          <a:p>
-            <a:pPr algn="ctr"/>
-          </a:p>
-        </p:txBody>
-      </p:sp>
-      <p:sp>
-        <p:nvSpPr>
-          <p:cNvPr id="14" name="번호 3"/>
-          <p:cNvSpPr/>
-          <p:nvPr/>
-        </p:nvSpPr>
-        <p:spPr>
-          <a:xfrm>
-            <a:off x="822959" y="4114800"/>
-            <a:ext cx="457200" cy="457200"/>
-          </a:xfrm>
-          <a:prstGeom prst="ellipse">
-            <a:avLst/>
-          </a:prstGeom>
-          <a:solidFill>
-            <a:srgbClr val="8D3443"/>
-          </a:solidFill>
-          <a:ln>
-            <a:noFill/>
-          </a:ln>
-        </p:spPr>
-        <p:txBody>
-          <a:bodyPr rtlCol="0" anchor="ctr" wrap="square" lIns="54864" rIns="54864" tIns="27432" bIns="27432">
-            <a:noAutofit/>
-          </a:bodyPr>
-          <a:lstStyle/>
-          <a:p>
-            <a:pPr algn="ctr">
-              <a:lnSpc>
-                <a:spcPct val="100000"/>
-              </a:lnSpc>
-            </a:pPr>
-            <a:r>
-              <a:rPr sz="1600" b="1" i="0">
-                <a:solidFill>
-                  <a:srgbClr val="FFFFFF"/>
-                </a:solidFill>
-              </a:rPr>
-              <a:t>3</a:t>
-            </a:r>
-          </a:p>
-        </p:txBody>
-      </p:sp>
-      <p:sp>
-        <p:nvSpPr>
-          <p:cNvPr id="15" name="TextBox 14"/>
+              <a:rPr sz="2400" b="1" i="0">
+                <a:solidFill>
+                  <a:srgbClr val="E198A4"/>
+                </a:solidFill>
+              </a:rPr>
+              <a:t>02</a:t>
+            </a:r>
+          </a:p>
+        </p:txBody>
+      </p:sp>
+      <p:sp>
+        <p:nvSpPr>
+          <p:cNvPr id="13" name="TextBox 12"/>
           <p:cNvSpPr txBox="1"/>
           <p:nvPr/>
         </p:nvSpPr>
         <p:spPr>
           <a:xfrm>
-            <a:off x="1508760" y="3886200"/>
+            <a:off x="1508760" y="2971800"/>
             <a:ext cx="2743200" cy="914400"/>
           </a:xfrm>
           <a:prstGeom prst="rect">
@@ -5728,23 +5849,23 @@
             <a:r>
               <a:rPr sz="1800" b="1" i="0">
                 <a:solidFill>
-                  <a:srgbClr val="431920"/>
-                </a:solidFill>
-              </a:rPr>
-              <a:t>약속 3</a:t>
-            </a:r>
-          </a:p>
-        </p:txBody>
-      </p:sp>
-      <p:sp>
-        <p:nvSpPr>
-          <p:cNvPr id="16" name="TextBox 15"/>
+                  <a:srgbClr val="49272D"/>
+                </a:solidFill>
+              </a:rPr>
+              <a:t>약속 2</a:t>
+            </a:r>
+          </a:p>
+        </p:txBody>
+      </p:sp>
+      <p:sp>
+        <p:nvSpPr>
+          <p:cNvPr id="14" name="TextBox 13"/>
           <p:cNvSpPr txBox="1"/>
           <p:nvPr/>
         </p:nvSpPr>
         <p:spPr>
           <a:xfrm>
-            <a:off x="4297680" y="3886200"/>
+            <a:off x="4297680" y="2971800"/>
             <a:ext cx="7071055" cy="914400"/>
           </a:xfrm>
           <a:prstGeom prst="rect">
@@ -5766,7 +5887,152 @@
             <a:r>
               <a:rPr sz="1700" b="0" i="0">
                 <a:solidFill>
-                  <a:srgbClr val="2B2B2B"/>
+                  <a:srgbClr val="26231F"/>
+                </a:solidFill>
+              </a:rPr>
+              <a:t>어른께 먼저 안부 전하기</a:t>
+            </a:r>
+          </a:p>
+        </p:txBody>
+      </p:sp>
+      <p:sp>
+        <p:nvSpPr>
+          <p:cNvPr id="15" name="줄 3"/>
+          <p:cNvSpPr/>
+          <p:nvPr/>
+        </p:nvSpPr>
+        <p:spPr>
+          <a:xfrm>
+            <a:off x="640080" y="4069080"/>
+            <a:ext cx="10911535" cy="1005840"/>
+          </a:xfrm>
+          <a:prstGeom prst="roundRect">
+            <a:avLst>
+              <a:gd name="adj" fmla="val 7000"/>
+            </a:avLst>
+          </a:prstGeom>
+          <a:noFill/>
+          <a:ln w="15875">
+            <a:solidFill>
+              <a:srgbClr val="E198A4"/>
+            </a:solidFill>
+          </a:ln>
+        </p:spPr>
+        <p:txBody>
+          <a:bodyPr rtlCol="0" anchor="ctr"/>
+          <a:lstStyle/>
+          <a:p>
+            <a:pPr algn="ctr"/>
+          </a:p>
+        </p:txBody>
+      </p:sp>
+      <p:sp>
+        <p:nvSpPr>
+          <p:cNvPr id="16" name="번호 3"/>
+          <p:cNvSpPr txBox="1"/>
+          <p:nvPr/>
+        </p:nvSpPr>
+        <p:spPr>
+          <a:xfrm>
+            <a:off x="731519" y="4297680"/>
+            <a:ext cx="914400" cy="548640"/>
+          </a:xfrm>
+          <a:prstGeom prst="rect">
+            <a:avLst/>
+          </a:prstGeom>
+          <a:noFill/>
+        </p:spPr>
+        <p:txBody>
+          <a:bodyPr wrap="square" lIns="54864" rIns="54864" tIns="27432" bIns="27432" anchor="ctr">
+            <a:noAutofit/>
+          </a:bodyPr>
+          <a:lstStyle/>
+          <a:p>
+            <a:pPr algn="l">
+              <a:lnSpc>
+                <a:spcPct val="115000"/>
+              </a:lnSpc>
+            </a:pPr>
+            <a:r>
+              <a:rPr sz="2400" b="1" i="0">
+                <a:solidFill>
+                  <a:srgbClr val="E198A4"/>
+                </a:solidFill>
+              </a:rPr>
+              <a:t>03</a:t>
+            </a:r>
+          </a:p>
+        </p:txBody>
+      </p:sp>
+      <p:sp>
+        <p:nvSpPr>
+          <p:cNvPr id="17" name="TextBox 16"/>
+          <p:cNvSpPr txBox="1"/>
+          <p:nvPr/>
+        </p:nvSpPr>
+        <p:spPr>
+          <a:xfrm>
+            <a:off x="1508760" y="4114800"/>
+            <a:ext cx="2743200" cy="914400"/>
+          </a:xfrm>
+          <a:prstGeom prst="rect">
+            <a:avLst/>
+          </a:prstGeom>
+          <a:noFill/>
+        </p:spPr>
+        <p:txBody>
+          <a:bodyPr wrap="square" lIns="54864" rIns="54864" tIns="27432" bIns="27432" anchor="ctr">
+            <a:noAutofit/>
+          </a:bodyPr>
+          <a:lstStyle/>
+          <a:p>
+            <a:pPr algn="l">
+              <a:lnSpc>
+                <a:spcPct val="115000"/>
+              </a:lnSpc>
+            </a:pPr>
+            <a:r>
+              <a:rPr sz="1800" b="1" i="0">
+                <a:solidFill>
+                  <a:srgbClr val="49272D"/>
+                </a:solidFill>
+              </a:rPr>
+              <a:t>약속 3</a:t>
+            </a:r>
+          </a:p>
+        </p:txBody>
+      </p:sp>
+      <p:sp>
+        <p:nvSpPr>
+          <p:cNvPr id="18" name="TextBox 17"/>
+          <p:cNvSpPr txBox="1"/>
+          <p:nvPr/>
+        </p:nvSpPr>
+        <p:spPr>
+          <a:xfrm>
+            <a:off x="4297680" y="4114800"/>
+            <a:ext cx="7071055" cy="914400"/>
+          </a:xfrm>
+          <a:prstGeom prst="rect">
+            <a:avLst/>
+          </a:prstGeom>
+          <a:noFill/>
+        </p:spPr>
+        <p:txBody>
+          <a:bodyPr wrap="square" lIns="54864" rIns="54864" tIns="27432" bIns="27432" anchor="ctr">
+            <a:noAutofit/>
+          </a:bodyPr>
+          <a:lstStyle/>
+          <a:p>
+            <a:pPr algn="l">
+              <a:lnSpc>
+                <a:spcPct val="115000"/>
+              </a:lnSpc>
+            </a:pPr>
+            <a:r>
+              <a:rPr sz="1700" b="0" i="0">
+                <a:solidFill>
+                  <a:srgbClr val="26231F"/>
                 </a:solidFill>
               </a:rPr>
               <a:t>한 달에 한 번 가족 식사</a:t>
@@ -5808,14 +6074,14 @@
         </p:nvSpPr>
         <p:spPr>
           <a:xfrm>
-            <a:off x="-182880" y="6144768"/>
-            <a:ext cx="12557455" cy="731520"/>
-          </a:xfrm>
-          <a:prstGeom prst="wave">
+            <a:off x="0" y="6565392"/>
+            <a:ext cx="12191695" cy="292608"/>
+          </a:xfrm>
+          <a:prstGeom prst="rect">
             <a:avLst/>
           </a:prstGeom>
           <a:solidFill>
-            <a:srgbClr val="F0D1D6"/>
+            <a:srgbClr val="EBADB8"/>
           </a:solidFill>
           <a:ln>
             <a:noFill/>
@@ -5831,20 +6097,20 @@
       </p:sp>
       <p:sp>
         <p:nvSpPr>
-          <p:cNvPr id="4" name="장식"/>
+          <p:cNvPr id="4" name="포인트"/>
           <p:cNvSpPr/>
           <p:nvPr/>
         </p:nvSpPr>
         <p:spPr>
           <a:xfrm>
-            <a:off x="-182880" y="6400800"/>
-            <a:ext cx="12557455" cy="502920"/>
-          </a:xfrm>
-          <a:prstGeom prst="wave">
+            <a:off x="5958687" y="246888"/>
+            <a:ext cx="274320" cy="274320"/>
+          </a:xfrm>
+          <a:prstGeom prst="heart">
             <a:avLst/>
           </a:prstGeom>
           <a:solidFill>
-            <a:srgbClr val="8D3443"/>
+            <a:srgbClr val="E198A4"/>
           </a:solidFill>
           <a:ln>
             <a:noFill/>
@@ -5855,6 +6121,73 @@
           <a:lstStyle/>
           <a:p>
             <a:pPr algn="ctr"/>
+          </a:p>
+        </p:txBody>
+      </p:sp>
+      <p:sp>
+        <p:nvSpPr>
+          <p:cNvPr id="5" name="장식"/>
+          <p:cNvSpPr/>
+          <p:nvPr/>
+        </p:nvSpPr>
+        <p:spPr>
+          <a:xfrm>
+            <a:off x="5684367" y="1572768"/>
+            <a:ext cx="822960" cy="22860"/>
+          </a:xfrm>
+          <a:prstGeom prst="rect">
+            <a:avLst/>
+          </a:prstGeom>
+          <a:solidFill>
+            <a:srgbClr val="E198A4"/>
+          </a:solidFill>
+          <a:ln>
+            <a:noFill/>
+          </a:ln>
+        </p:spPr>
+        <p:txBody>
+          <a:bodyPr rtlCol="0" anchor="ctr"/>
+          <a:lstStyle/>
+          <a:p>
+            <a:pPr algn="ctr"/>
+          </a:p>
+        </p:txBody>
+      </p:sp>
+      <p:sp>
+        <p:nvSpPr>
+          <p:cNvPr id="6" name="상단 라벨"/>
+          <p:cNvSpPr txBox="1"/>
+          <p:nvPr/>
+        </p:nvSpPr>
+        <p:spPr>
+          <a:xfrm>
+            <a:off x="640080" y="182880"/>
+            <a:ext cx="3657600" cy="274320"/>
+          </a:xfrm>
+          <a:prstGeom prst="rect">
+            <a:avLst/>
+          </a:prstGeom>
+          <a:noFill/>
+        </p:spPr>
+        <p:txBody>
+          <a:bodyPr wrap="square" lIns="54864" rIns="54864" tIns="27432" bIns="27432" anchor="ctr">
+            <a:noAutofit/>
+          </a:bodyPr>
+          <a:lstStyle/>
+          <a:p>
+            <a:pPr algn="l">
+              <a:lnSpc>
+                <a:spcPct val="115000"/>
+              </a:lnSpc>
+            </a:pPr>
+            <a:r>
+              <a:rPr sz="800" b="1" i="0" spc="250">
+                <a:solidFill>
+                  <a:srgbClr val="8E8780"/>
+                </a:solidFill>
+              </a:rPr>
+              <a:t>FAMILY ALBUM</a:t>
+            </a:r>
           </a:p>
         </p:txBody>
       </p:sp>
@@ -5870,8 +6203,8 @@
         </p:nvSpPr>
         <p:spPr>
           <a:xfrm>
-            <a:off x="640080" y="457200"/>
-            <a:ext cx="9722815" cy="868680"/>
+            <a:off x="1371600" y="640080"/>
+            <a:ext cx="9448495" cy="868680"/>
           </a:xfrm>
         </p:spPr>
         <p:txBody>
@@ -5880,7 +6213,7 @@
           </a:bodyPr>
           <a:lstStyle/>
           <a:p>
-            <a:pPr algn="l">
+            <a:pPr algn="ctr">
               <a:lnSpc>
                 <a:spcPct val="105000"/>
               </a:lnSpc>
@@ -5888,7 +6221,7 @@
             <a:r>
               <a:rPr sz="3000" b="1" i="0">
                 <a:solidFill>
-                  <a:srgbClr val="431920"/>
+                  <a:srgbClr val="26231F"/>
                 </a:solidFill>
               </a:rPr>
               <a:t>가족 사진</a:t>
@@ -5898,13 +6231,13 @@
       </p:sp>
       <p:sp>
         <p:nvSpPr>
-          <p:cNvPr id="5" name="사진 자리"/>
+          <p:cNvPr id="7" name="사진 자리"/>
           <p:cNvSpPr/>
           <p:nvPr/>
         </p:nvSpPr>
         <p:spPr>
           <a:xfrm>
-            <a:off x="640080" y="1554480"/>
+            <a:off x="640080" y="1783080"/>
             <a:ext cx="3515258" cy="2103120"/>
           </a:xfrm>
           <a:prstGeom prst="roundRect">
@@ -5913,12 +6246,10 @@
             </a:avLst>
           </a:prstGeom>
           <a:solidFill>
-            <a:srgbClr val="F0D1D6"/>
+            <a:srgbClr val="F6D5DA"/>
           </a:solidFill>
           <a:ln w="19050">
-            <a:solidFill>
-              <a:srgbClr val="8D3443"/>
-            </a:solidFill>
+            <a:noFill/>
             <a:prstDash val="dash"/>
           </a:ln>
         </p:spPr>
@@ -5936,7 +6267,7 @@
             <a:r>
               <a:rPr sz="1200" b="0" i="0">
                 <a:solidFill>
-                  <a:srgbClr val="431920"/>
+                  <a:srgbClr val="8E8780"/>
                 </a:solidFill>
               </a:rPr>
               <a:t>사진 1</a:t>
@@ -5946,13 +6277,13 @@
       </p:sp>
       <p:sp>
         <p:nvSpPr>
-          <p:cNvPr id="6" name="사진 자리"/>
+          <p:cNvPr id="8" name="사진 자리"/>
           <p:cNvSpPr/>
           <p:nvPr/>
         </p:nvSpPr>
         <p:spPr>
           <a:xfrm>
-            <a:off x="4338218" y="1554480"/>
+            <a:off x="4338218" y="1783080"/>
             <a:ext cx="3515258" cy="2103120"/>
           </a:xfrm>
           <a:prstGeom prst="roundRect">
@@ -5961,12 +6292,10 @@
             </a:avLst>
           </a:prstGeom>
           <a:solidFill>
-            <a:srgbClr val="F0D1D6"/>
+            <a:srgbClr val="F6D5DA"/>
           </a:solidFill>
           <a:ln w="19050">
-            <a:solidFill>
-              <a:srgbClr val="8D3443"/>
-            </a:solidFill>
+            <a:noFill/>
             <a:prstDash val="dash"/>
           </a:ln>
         </p:spPr>
@@ -5984,7 +6313,7 @@
             <a:r>
               <a:rPr sz="1200" b="0" i="0">
                 <a:solidFill>
-                  <a:srgbClr val="431920"/>
+                  <a:srgbClr val="8E8780"/>
                 </a:solidFill>
               </a:rPr>
               <a:t>사진 2</a:t>
@@ -5994,13 +6323,13 @@
       </p:sp>
       <p:sp>
         <p:nvSpPr>
-          <p:cNvPr id="7" name="사진 자리"/>
+          <p:cNvPr id="9" name="사진 자리"/>
           <p:cNvSpPr/>
           <p:nvPr/>
         </p:nvSpPr>
         <p:spPr>
           <a:xfrm>
-            <a:off x="8036356" y="1554480"/>
+            <a:off x="8036356" y="1783080"/>
             <a:ext cx="3515258" cy="2103120"/>
           </a:xfrm>
           <a:prstGeom prst="roundRect">
@@ -6009,12 +6338,10 @@
             </a:avLst>
           </a:prstGeom>
           <a:solidFill>
-            <a:srgbClr val="F0D1D6"/>
+            <a:srgbClr val="F6D5DA"/>
           </a:solidFill>
           <a:ln w="19050">
-            <a:solidFill>
-              <a:srgbClr val="8D3443"/>
-            </a:solidFill>
+            <a:noFill/>
             <a:prstDash val="dash"/>
           </a:ln>
         </p:spPr>
@@ -6032,7 +6359,7 @@
             <a:r>
               <a:rPr sz="1200" b="0" i="0">
                 <a:solidFill>
-                  <a:srgbClr val="431920"/>
+                  <a:srgbClr val="8E8780"/>
                 </a:solidFill>
               </a:rPr>
               <a:t>사진 3</a:t>
@@ -6042,13 +6369,13 @@
       </p:sp>
       <p:sp>
         <p:nvSpPr>
-          <p:cNvPr id="8" name="사진 자리"/>
+          <p:cNvPr id="10" name="사진 자리"/>
           <p:cNvSpPr/>
           <p:nvPr/>
         </p:nvSpPr>
         <p:spPr>
           <a:xfrm>
-            <a:off x="640080" y="3840480"/>
+            <a:off x="640080" y="4069080"/>
             <a:ext cx="3515258" cy="2103120"/>
           </a:xfrm>
           <a:prstGeom prst="roundRect">
@@ -6057,12 +6384,10 @@
             </a:avLst>
           </a:prstGeom>
           <a:solidFill>
-            <a:srgbClr val="F0D1D6"/>
+            <a:srgbClr val="F6D5DA"/>
           </a:solidFill>
           <a:ln w="19050">
-            <a:solidFill>
-              <a:srgbClr val="8D3443"/>
-            </a:solidFill>
+            <a:noFill/>
             <a:prstDash val="dash"/>
           </a:ln>
         </p:spPr>
@@ -6080,7 +6405,7 @@
             <a:r>
               <a:rPr sz="1200" b="0" i="0">
                 <a:solidFill>
-                  <a:srgbClr val="431920"/>
+                  <a:srgbClr val="8E8780"/>
                 </a:solidFill>
               </a:rPr>
               <a:t>사진 4</a:t>
@@ -6090,13 +6415,13 @@
       </p:sp>
       <p:sp>
         <p:nvSpPr>
-          <p:cNvPr id="9" name="사진 자리"/>
+          <p:cNvPr id="11" name="사진 자리"/>
           <p:cNvSpPr/>
           <p:nvPr/>
         </p:nvSpPr>
         <p:spPr>
           <a:xfrm>
-            <a:off x="4338218" y="3840480"/>
+            <a:off x="4338218" y="4069080"/>
             <a:ext cx="3515258" cy="2103120"/>
           </a:xfrm>
           <a:prstGeom prst="roundRect">
@@ -6105,12 +6430,10 @@
             </a:avLst>
           </a:prstGeom>
           <a:solidFill>
-            <a:srgbClr val="F0D1D6"/>
+            <a:srgbClr val="F6D5DA"/>
           </a:solidFill>
           <a:ln w="19050">
-            <a:solidFill>
-              <a:srgbClr val="8D3443"/>
-            </a:solidFill>
+            <a:noFill/>
             <a:prstDash val="dash"/>
           </a:ln>
         </p:spPr>
@@ -6128,7 +6451,7 @@
             <a:r>
               <a:rPr sz="1200" b="0" i="0">
                 <a:solidFill>
-                  <a:srgbClr val="431920"/>
+                  <a:srgbClr val="8E8780"/>
                 </a:solidFill>
               </a:rPr>
               <a:t>사진 5</a:t>
@@ -6138,13 +6461,13 @@
       </p:sp>
       <p:sp>
         <p:nvSpPr>
-          <p:cNvPr id="10" name="사진 자리"/>
+          <p:cNvPr id="12" name="사진 자리"/>
           <p:cNvSpPr/>
           <p:nvPr/>
         </p:nvSpPr>
         <p:spPr>
           <a:xfrm>
-            <a:off x="8036356" y="3840480"/>
+            <a:off x="8036356" y="4069080"/>
             <a:ext cx="3515258" cy="2103120"/>
           </a:xfrm>
           <a:prstGeom prst="roundRect">
@@ -6153,12 +6476,10 @@
             </a:avLst>
           </a:prstGeom>
           <a:solidFill>
-            <a:srgbClr val="F0D1D6"/>
+            <a:srgbClr val="F6D5DA"/>
           </a:solidFill>
           <a:ln w="19050">
-            <a:solidFill>
-              <a:srgbClr val="8D3443"/>
-            </a:solidFill>
+            <a:noFill/>
             <a:prstDash val="dash"/>
           </a:ln>
         </p:spPr>
@@ -6176,7 +6497,7 @@
             <a:r>
               <a:rPr sz="1200" b="0" i="0">
                 <a:solidFill>
-                  <a:srgbClr val="431920"/>
+                  <a:srgbClr val="8E8780"/>
                 </a:solidFill>
               </a:rPr>
               <a:t>사진 6</a:t>
@@ -6195,6 +6516,14 @@
 <file path=ppt/slides/slide6.xml><?xml version="1.0" encoding="utf-8"?>
 <p:sld xmlns:a="http://schemas.openxmlformats.org/drawingml/2006/main" xmlns:p="http://schemas.openxmlformats.org/presentationml/2006/main" xmlns:r="http://schemas.openxmlformats.org/officeDocument/2006/relationships">
   <p:cSld>
+    <p:bg>
+      <p:bgPr>
+        <a:solidFill>
+          <a:srgbClr val="F6D5DA"/>
+        </a:solidFill>
+        <a:effectLst/>
+      </p:bgPr>
+    </p:bg>
     <p:spTree>
       <p:nvGrpSpPr>
         <p:cNvPr id="1" name=""/>
@@ -6202,30 +6531,120 @@
         <p:nvPr/>
       </p:nvGrpSpPr>
       <p:grpSpPr/>
-      <p:pic>
-        <p:nvPicPr>
-          <p:cNvPr id="3" name="표지 그림" descr="family-43.jpg"/>
-          <p:cNvPicPr>
-            <a:picLocks noChangeAspect="1"/>
-          </p:cNvPicPr>
-          <p:nvPr/>
-        </p:nvPicPr>
-        <p:blipFill>
-          <a:blip r:embed="rId2"/>
-          <a:stretch>
-            <a:fillRect/>
-          </a:stretch>
-        </p:blipFill>
-        <p:spPr>
-          <a:xfrm>
-            <a:off x="0" y="0"/>
-            <a:ext cx="12191695" cy="6858000"/>
+      <p:sp>
+        <p:nvSpPr>
+          <p:cNvPr id="3" name="사진 자리"/>
+          <p:cNvSpPr/>
+          <p:nvPr/>
+        </p:nvSpPr>
+        <p:spPr>
+          <a:xfrm>
+            <a:off x="7071183" y="960120"/>
+            <a:ext cx="3657508" cy="4526280"/>
+          </a:xfrm>
+          <a:prstGeom prst="roundRect">
+            <a:avLst>
+              <a:gd name="adj" fmla="val 4000"/>
+            </a:avLst>
+          </a:prstGeom>
+          <a:solidFill>
+            <a:srgbClr val="EBADB8"/>
+          </a:solidFill>
+          <a:ln>
+            <a:noFill/>
+          </a:ln>
+        </p:spPr>
+        <p:txBody>
+          <a:bodyPr rtlCol="0" anchor="ctr" wrap="square" lIns="54864" rIns="54864" tIns="27432" bIns="27432">
+            <a:noAutofit/>
+          </a:bodyPr>
+          <a:lstStyle/>
+          <a:p>
+            <a:pPr algn="ctr">
+              <a:lnSpc>
+                <a:spcPct val="100000"/>
+              </a:lnSpc>
+            </a:pPr>
+            <a:r>
+              <a:rPr sz="1400" b="0" i="0">
+                <a:solidFill>
+                  <a:srgbClr val="49272D"/>
+                </a:solidFill>
+              </a:rPr>
+              <a:t>사진을 넣어 주세요</a:t>
+            </a:r>
+          </a:p>
+        </p:txBody>
+      </p:sp>
+      <p:sp>
+        <p:nvSpPr>
+          <p:cNvPr id="4" name="장식"/>
+          <p:cNvSpPr/>
+          <p:nvPr/>
+        </p:nvSpPr>
+        <p:spPr>
+          <a:xfrm>
+            <a:off x="7558851" y="1234439"/>
+            <a:ext cx="3657508" cy="4526280"/>
+          </a:xfrm>
+          <a:prstGeom prst="roundRect">
+            <a:avLst>
+              <a:gd name="adj" fmla="val 4000"/>
+            </a:avLst>
+          </a:prstGeom>
+          <a:noFill/>
+          <a:ln w="9525">
+            <a:solidFill>
+              <a:srgbClr val="26231F"/>
+            </a:solidFill>
+          </a:ln>
+        </p:spPr>
+        <p:txBody>
+          <a:bodyPr rtlCol="0" anchor="ctr"/>
+          <a:lstStyle/>
+          <a:p>
+            <a:pPr algn="ctr"/>
+          </a:p>
+        </p:txBody>
+      </p:sp>
+      <p:sp>
+        <p:nvSpPr>
+          <p:cNvPr id="5" name="라벨"/>
+          <p:cNvSpPr txBox="1"/>
+          <p:nvPr/>
+        </p:nvSpPr>
+        <p:spPr>
+          <a:xfrm>
+            <a:off x="822960" y="2148840"/>
+            <a:ext cx="5608179" cy="274320"/>
           </a:xfrm>
           <a:prstGeom prst="rect">
             <a:avLst/>
           </a:prstGeom>
-        </p:spPr>
-      </p:pic>
+          <a:noFill/>
+        </p:spPr>
+        <p:txBody>
+          <a:bodyPr wrap="square" lIns="54864" rIns="54864" tIns="27432" bIns="27432" anchor="t">
+            <a:noAutofit/>
+          </a:bodyPr>
+          <a:lstStyle/>
+          <a:p>
+            <a:pPr algn="l">
+              <a:lnSpc>
+                <a:spcPct val="115000"/>
+              </a:lnSpc>
+            </a:pPr>
+            <a:r>
+              <a:rPr sz="1000" b="1" i="0" spc="250">
+                <a:solidFill>
+                  <a:srgbClr val="26231F"/>
+                </a:solidFill>
+              </a:rPr>
+              <a:t>FAMILY ALBUM</a:t>
+            </a:r>
+          </a:p>
+        </p:txBody>
+      </p:sp>
       <p:sp>
         <p:nvSpPr>
           <p:cNvPr id="2" name="Title 1"/>
@@ -6238,8 +6657,8 @@
         </p:nvSpPr>
         <p:spPr>
           <a:xfrm>
-            <a:off x="853418" y="2057400"/>
-            <a:ext cx="6095847" cy="1554480"/>
+            <a:off x="822960" y="2606040"/>
+            <a:ext cx="5608179" cy="1188720"/>
           </a:xfrm>
         </p:spPr>
         <p:txBody>
@@ -6254,9 +6673,9 @@
               </a:lnSpc>
             </a:pPr>
             <a:r>
-              <a:rPr sz="3600" b="1" i="0">
-                <a:solidFill>
-                  <a:srgbClr val="431920"/>
+              <a:rPr sz="4000" b="1" i="0">
+                <a:solidFill>
+                  <a:srgbClr val="26231F"/>
                 </a:solidFill>
               </a:rPr>
               <a:t>우리 가족 소개를 마칩니다</a:t>
@@ -6266,14 +6685,14 @@
       </p:sp>
       <p:sp>
         <p:nvSpPr>
-          <p:cNvPr id="4" name="한 줄 문구"/>
+          <p:cNvPr id="6" name="한 줄 문구"/>
           <p:cNvSpPr txBox="1"/>
           <p:nvPr/>
         </p:nvSpPr>
         <p:spPr>
           <a:xfrm>
-            <a:off x="853418" y="3749039"/>
-            <a:ext cx="6095847" cy="822960"/>
+            <a:off x="822960" y="3886200"/>
+            <a:ext cx="5608179" cy="822960"/>
           </a:xfrm>
           <a:prstGeom prst="rect">
             <a:avLst/>
@@ -6292,9 +6711,9 @@
               </a:lnSpc>
             </a:pPr>
             <a:r>
-              <a:rPr sz="1700" b="0" i="1">
-                <a:solidFill>
-                  <a:srgbClr val="431920"/>
+              <a:rPr sz="1700" b="0" i="0">
+                <a:solidFill>
+                  <a:srgbClr val="26231F"/>
                 </a:solidFill>
               </a:rPr>
               <a:t>읽어 주셔서 고맙습니다</a:t>
@@ -6304,14 +6723,14 @@
       </p:sp>
       <p:sp>
         <p:nvSpPr>
-          <p:cNvPr id="5" name="안내 문구"/>
+          <p:cNvPr id="7" name="안내 문구"/>
           <p:cNvSpPr txBox="1"/>
           <p:nvPr/>
         </p:nvSpPr>
         <p:spPr>
           <a:xfrm>
-            <a:off x="853418" y="4617720"/>
-            <a:ext cx="6095847" cy="914400"/>
+            <a:off x="822960" y="4754880"/>
+            <a:ext cx="5608179" cy="914400"/>
           </a:xfrm>
           <a:prstGeom prst="rect">
             <a:avLst/>
@@ -6332,7 +6751,7 @@
             <a:r>
               <a:rPr sz="1400" b="0" i="0">
                 <a:solidFill>
-                  <a:srgbClr val="666666"/>
+                  <a:srgbClr val="26231F"/>
                 </a:solidFill>
               </a:rPr>
               <a:t>고맙습니다 · 가족 이름</a:t>
@@ -6359,34 +6778,34 @@
         <a:sysClr val="window" lastClr="FFFFFF"/>
       </a:lt1>
       <a:dk2>
-        <a:srgbClr val="431920"/>
+        <a:srgbClr val="49272D"/>
       </a:dk2>
       <a:lt2>
-        <a:srgbClr val="F9F0F2"/>
+        <a:srgbClr val="FBECEF"/>
       </a:lt2>
       <a:accent1>
-        <a:srgbClr val="8D3443"/>
+        <a:srgbClr val="E198A4"/>
       </a:accent1>
       <a:accent2>
-        <a:srgbClr val="3B9158"/>
+        <a:srgbClr val="EAC7B8"/>
       </a:accent2>
       <a:accent3>
-        <a:srgbClr val="431920"/>
+        <a:srgbClr val="49272D"/>
       </a:accent3>
       <a:accent4>
-        <a:srgbClr val="F0D1D6"/>
+        <a:srgbClr val="F6D5DA"/>
       </a:accent4>
       <a:accent5>
-        <a:srgbClr val="64624E"/>
+        <a:srgbClr val="E6B0AE"/>
       </a:accent5>
       <a:accent6>
-        <a:srgbClr val="8E7579"/>
+        <a:srgbClr val="927D81"/>
       </a:accent6>
       <a:hlink>
-        <a:srgbClr val="8D3443"/>
+        <a:srgbClr val="E198A4"/>
       </a:hlink>
       <a:folHlink>
-        <a:srgbClr val="431920"/>
+        <a:srgbClr val="49272D"/>
       </a:folHlink>
     </a:clrScheme>
     <a:fontScheme name="Office">
